--- a/lectures/lecture17/MapsAndHashing.pptx
+++ b/lectures/lecture17/MapsAndHashing.pptx
@@ -30,10 +30,12 @@
     <p:sldId id="279" r:id="rId24"/>
     <p:sldId id="280" r:id="rId25"/>
     <p:sldId id="281" r:id="rId26"/>
-    <p:sldId id="282" r:id="rId27"/>
-    <p:sldId id="283" r:id="rId28"/>
-    <p:sldId id="284" r:id="rId29"/>
-    <p:sldId id="285" r:id="rId30"/>
+    <p:sldId id="286" r:id="rId27"/>
+    <p:sldId id="287" r:id="rId28"/>
+    <p:sldId id="282" r:id="rId29"/>
+    <p:sldId id="283" r:id="rId30"/>
+    <p:sldId id="284" r:id="rId31"/>
+    <p:sldId id="285" r:id="rId32"/>
   </p:sldIdLst>
   <p:sldSz cx="12192000" cy="6858000"/>
   <p:notesSz cx="6858000" cy="9144000"/>
@@ -138,7 +140,7 @@
 <file path=ppt/revisionInfo.xml><?xml version="1.0" encoding="utf-8"?>
 <p1510:revInfo xmlns:a="http://schemas.openxmlformats.org/drawingml/2006/main" xmlns:r="http://schemas.openxmlformats.org/officeDocument/2006/relationships" xmlns:p1510="http://schemas.microsoft.com/office/powerpoint/2015/10/main">
   <p1510:revLst>
-    <p1510:client id="{9E4120B7-E79F-894A-85DF-E38C1A5747FE}" v="1457" dt="2026-06-23T04:24:44.377"/>
+    <p1510:client id="{9E4120B7-E79F-894A-85DF-E38C1A5747FE}" v="1465" dt="2026-06-23T20:03:03.341"/>
   </p1510:revLst>
 </p1510:revInfo>
 </file>
@@ -8722,7 +8724,7 @@
             <p:spPr/>
             <p:txBody>
               <a:bodyPr>
-                <a:normAutofit fontScale="92500" lnSpcReduction="20000"/>
+                <a:normAutofit fontScale="70000" lnSpcReduction="20000"/>
               </a:bodyPr>
               <a:lstStyle/>
               <a:p>
@@ -8831,6 +8833,26 @@
                   <a:t>Double hashing</a:t>
                 </a:r>
               </a:p>
+              <a:p>
+                <a:pPr lvl="1"/>
+                <a:r>
+                  <a:rPr lang="en-US" dirty="0"/>
+                  <a:t>Load factors and rehashing</a:t>
+                </a:r>
+              </a:p>
+              <a:p>
+                <a:pPr lvl="1"/>
+                <a:r>
+                  <a:rPr lang="en-US" dirty="0"/>
+                  <a:t>Deletion with tombstones</a:t>
+                </a:r>
+              </a:p>
+              <a:p>
+                <a:r>
+                  <a:rPr lang="en-US" dirty="0"/>
+                  <a:t>Hash tables in practice</a:t>
+                </a:r>
+              </a:p>
             </p:txBody>
           </p:sp>
         </mc:Choice>
@@ -8855,7 +8877,7 @@
               <a:blipFill>
                 <a:blip r:embed="rId2"/>
                 <a:stretch>
-                  <a:fillRect l="-965" t="-3488"/>
+                  <a:fillRect l="-603" t="-2035"/>
                 </a:stretch>
               </a:blipFill>
             </p:spPr>
@@ -13474,6 +13496,1230 @@
 </file>
 
 <file path=ppt/slides/slide26.xml><?xml version="1.0" encoding="utf-8"?>
+<p:sld xmlns:a="http://schemas.openxmlformats.org/drawingml/2006/main" xmlns:r="http://schemas.openxmlformats.org/officeDocument/2006/relationships" xmlns:p="http://schemas.openxmlformats.org/presentationml/2006/main">
+  <p:cSld>
+    <p:spTree>
+      <p:nvGrpSpPr>
+        <p:cNvPr id="1" name=""/>
+        <p:cNvGrpSpPr/>
+        <p:nvPr/>
+      </p:nvGrpSpPr>
+      <p:grpSpPr>
+        <a:xfrm>
+          <a:off x="0" y="0"/>
+          <a:ext cx="0" cy="0"/>
+          <a:chOff x="0" y="0"/>
+          <a:chExt cx="0" cy="0"/>
+        </a:xfrm>
+      </p:grpSpPr>
+      <p:sp>
+        <p:nvSpPr>
+          <p:cNvPr id="2" name="Title 1">
+            <a:extLst>
+              <a:ext uri="{FF2B5EF4-FFF2-40B4-BE49-F238E27FC236}">
+                <a16:creationId xmlns:a16="http://schemas.microsoft.com/office/drawing/2014/main" id="{B93827AD-4B98-2685-09C0-855C03ACF9D3}"/>
+              </a:ext>
+            </a:extLst>
+          </p:cNvPr>
+          <p:cNvSpPr>
+            <a:spLocks noGrp="1"/>
+          </p:cNvSpPr>
+          <p:nvPr>
+            <p:ph type="title"/>
+          </p:nvPr>
+        </p:nvSpPr>
+        <p:spPr/>
+        <p:txBody>
+          <a:bodyPr/>
+          <a:lstStyle/>
+          <a:p>
+            <a:r>
+              <a:rPr lang="en-US"/>
+              <a:t>Deletion with Tombstones</a:t>
+            </a:r>
+            <a:endParaRPr lang="en-US" dirty="0"/>
+          </a:p>
+        </p:txBody>
+      </p:sp>
+      <p:sp>
+        <p:nvSpPr>
+          <p:cNvPr id="3" name="Content Placeholder 2">
+            <a:extLst>
+              <a:ext uri="{FF2B5EF4-FFF2-40B4-BE49-F238E27FC236}">
+                <a16:creationId xmlns:a16="http://schemas.microsoft.com/office/drawing/2014/main" id="{5A62411E-57EE-090F-208F-5BB8AD9A5A3F}"/>
+              </a:ext>
+            </a:extLst>
+          </p:cNvPr>
+          <p:cNvSpPr>
+            <a:spLocks noGrp="1"/>
+          </p:cNvSpPr>
+          <p:nvPr>
+            <p:ph idx="1"/>
+          </p:nvPr>
+        </p:nvSpPr>
+        <p:spPr/>
+        <p:txBody>
+          <a:bodyPr/>
+          <a:lstStyle/>
+          <a:p>
+            <a:r>
+              <a:rPr lang="en-US" dirty="0"/>
+              <a:t>In a hash table that uses linear probing or variations, you can’t just delete items</a:t>
+            </a:r>
+          </a:p>
+          <a:p>
+            <a:r>
+              <a:rPr lang="en-US" dirty="0"/>
+              <a:t>Deleting an item breaks the chain of items needed to find/put other items</a:t>
+            </a:r>
+          </a:p>
+          <a:p>
+            <a:r>
+              <a:rPr lang="en-US" dirty="0"/>
+              <a:t>Standard solution: </a:t>
+            </a:r>
+            <a:r>
+              <a:rPr lang="en-US" b="1" dirty="0"/>
+              <a:t>tombstones</a:t>
+            </a:r>
+          </a:p>
+          <a:p>
+            <a:pPr lvl="1"/>
+            <a:r>
+              <a:rPr lang="en-US" dirty="0"/>
+              <a:t>When you delete an item, but a tombstone in its place, i.e. mark it as deleted but not empty so that find/put keeps working</a:t>
+            </a:r>
+          </a:p>
+          <a:p>
+            <a:pPr lvl="1"/>
+            <a:r>
+              <a:rPr lang="en-US" dirty="0"/>
+              <a:t>Over time tombstones can degrade performance, and so you may need to re-hash the table occasionally</a:t>
+            </a:r>
+          </a:p>
+        </p:txBody>
+      </p:sp>
+    </p:spTree>
+    <p:extLst>
+      <p:ext uri="{BB962C8B-B14F-4D97-AF65-F5344CB8AC3E}">
+        <p14:creationId xmlns:p14="http://schemas.microsoft.com/office/powerpoint/2010/main" val="3102504299"/>
+      </p:ext>
+    </p:extLst>
+  </p:cSld>
+  <p:clrMapOvr>
+    <a:masterClrMapping/>
+  </p:clrMapOvr>
+</p:sld>
+</file>
+
+<file path=ppt/slides/slide27.xml><?xml version="1.0" encoding="utf-8"?>
+<p:sld xmlns:a="http://schemas.openxmlformats.org/drawingml/2006/main" xmlns:r="http://schemas.openxmlformats.org/officeDocument/2006/relationships" xmlns:p="http://schemas.openxmlformats.org/presentationml/2006/main">
+  <p:cSld>
+    <p:spTree>
+      <p:nvGrpSpPr>
+        <p:cNvPr id="1" name="">
+          <a:extLst>
+            <a:ext uri="{FF2B5EF4-FFF2-40B4-BE49-F238E27FC236}">
+              <a16:creationId xmlns:a16="http://schemas.microsoft.com/office/drawing/2014/main" id="{0BA61E54-F259-50F2-46DE-9E1A91C9D1FE}"/>
+            </a:ext>
+          </a:extLst>
+        </p:cNvPr>
+        <p:cNvGrpSpPr/>
+        <p:nvPr/>
+      </p:nvGrpSpPr>
+      <p:grpSpPr>
+        <a:xfrm>
+          <a:off x="0" y="0"/>
+          <a:ext cx="0" cy="0"/>
+          <a:chOff x="0" y="0"/>
+          <a:chExt cx="0" cy="0"/>
+        </a:xfrm>
+      </p:grpSpPr>
+      <p:sp>
+        <p:nvSpPr>
+          <p:cNvPr id="2" name="Title 1">
+            <a:extLst>
+              <a:ext uri="{FF2B5EF4-FFF2-40B4-BE49-F238E27FC236}">
+                <a16:creationId xmlns:a16="http://schemas.microsoft.com/office/drawing/2014/main" id="{F24194B4-47D6-F612-D86B-BE31F7187BC2}"/>
+              </a:ext>
+            </a:extLst>
+          </p:cNvPr>
+          <p:cNvSpPr>
+            <a:spLocks noGrp="1"/>
+          </p:cNvSpPr>
+          <p:nvPr>
+            <p:ph type="title"/>
+          </p:nvPr>
+        </p:nvSpPr>
+        <p:spPr/>
+        <p:txBody>
+          <a:bodyPr/>
+          <a:lstStyle/>
+          <a:p>
+            <a:r>
+              <a:rPr lang="en-US" dirty="0"/>
+              <a:t>Deletion with Tombstones</a:t>
+            </a:r>
+          </a:p>
+        </p:txBody>
+      </p:sp>
+      <p:graphicFrame>
+        <p:nvGraphicFramePr>
+          <p:cNvPr id="4" name="Table 3">
+            <a:extLst>
+              <a:ext uri="{FF2B5EF4-FFF2-40B4-BE49-F238E27FC236}">
+                <a16:creationId xmlns:a16="http://schemas.microsoft.com/office/drawing/2014/main" id="{D4860A86-30F3-3AE4-9FE3-2D36B28AC279}"/>
+              </a:ext>
+            </a:extLst>
+          </p:cNvPr>
+          <p:cNvGraphicFramePr>
+            <a:graphicFrameLocks noGrp="1"/>
+          </p:cNvGraphicFramePr>
+          <p:nvPr>
+            <p:extLst>
+              <p:ext uri="{D42A27DB-BD31-4B8C-83A1-F6EECF244321}">
+                <p14:modId xmlns:p14="http://schemas.microsoft.com/office/powerpoint/2010/main" val="2403510455"/>
+              </p:ext>
+            </p:extLst>
+          </p:nvPr>
+        </p:nvGraphicFramePr>
+        <p:xfrm>
+          <a:off x="1090803" y="2039702"/>
+          <a:ext cx="8128001" cy="741680"/>
+        </p:xfrm>
+        <a:graphic>
+          <a:graphicData uri="http://schemas.openxmlformats.org/drawingml/2006/table">
+            <a:tbl>
+              <a:tblPr firstRow="1" bandRow="1">
+                <a:tableStyleId>{5C22544A-7EE6-4342-B048-85BDC9FD1C3A}</a:tableStyleId>
+              </a:tblPr>
+              <a:tblGrid>
+                <a:gridCol w="1161143">
+                  <a:extLst>
+                    <a:ext uri="{9D8B030D-6E8A-4147-A177-3AD203B41FA5}">
+                      <a16:colId xmlns:a16="http://schemas.microsoft.com/office/drawing/2014/main" val="676990233"/>
+                    </a:ext>
+                  </a:extLst>
+                </a:gridCol>
+                <a:gridCol w="1161143">
+                  <a:extLst>
+                    <a:ext uri="{9D8B030D-6E8A-4147-A177-3AD203B41FA5}">
+                      <a16:colId xmlns:a16="http://schemas.microsoft.com/office/drawing/2014/main" val="3312227759"/>
+                    </a:ext>
+                  </a:extLst>
+                </a:gridCol>
+                <a:gridCol w="1161143">
+                  <a:extLst>
+                    <a:ext uri="{9D8B030D-6E8A-4147-A177-3AD203B41FA5}">
+                      <a16:colId xmlns:a16="http://schemas.microsoft.com/office/drawing/2014/main" val="2786461669"/>
+                    </a:ext>
+                  </a:extLst>
+                </a:gridCol>
+                <a:gridCol w="1161143">
+                  <a:extLst>
+                    <a:ext uri="{9D8B030D-6E8A-4147-A177-3AD203B41FA5}">
+                      <a16:colId xmlns:a16="http://schemas.microsoft.com/office/drawing/2014/main" val="3275343878"/>
+                    </a:ext>
+                  </a:extLst>
+                </a:gridCol>
+                <a:gridCol w="1161143">
+                  <a:extLst>
+                    <a:ext uri="{9D8B030D-6E8A-4147-A177-3AD203B41FA5}">
+                      <a16:colId xmlns:a16="http://schemas.microsoft.com/office/drawing/2014/main" val="856231369"/>
+                    </a:ext>
+                  </a:extLst>
+                </a:gridCol>
+                <a:gridCol w="1161143">
+                  <a:extLst>
+                    <a:ext uri="{9D8B030D-6E8A-4147-A177-3AD203B41FA5}">
+                      <a16:colId xmlns:a16="http://schemas.microsoft.com/office/drawing/2014/main" val="3960613019"/>
+                    </a:ext>
+                  </a:extLst>
+                </a:gridCol>
+                <a:gridCol w="1161143">
+                  <a:extLst>
+                    <a:ext uri="{9D8B030D-6E8A-4147-A177-3AD203B41FA5}">
+                      <a16:colId xmlns:a16="http://schemas.microsoft.com/office/drawing/2014/main" val="2572298294"/>
+                    </a:ext>
+                  </a:extLst>
+                </a:gridCol>
+              </a:tblGrid>
+              <a:tr h="370840">
+                <a:tc>
+                  <a:txBody>
+                    <a:bodyPr/>
+                    <a:lstStyle/>
+                    <a:p>
+                      <a:pPr algn="ctr"/>
+                      <a:r>
+                        <a:rPr lang="en-US" dirty="0"/>
+                        <a:t>0</a:t>
+                      </a:r>
+                    </a:p>
+                  </a:txBody>
+                  <a:tcPr/>
+                </a:tc>
+                <a:tc>
+                  <a:txBody>
+                    <a:bodyPr/>
+                    <a:lstStyle/>
+                    <a:p>
+                      <a:pPr algn="ctr"/>
+                      <a:r>
+                        <a:rPr lang="en-US" dirty="0"/>
+                        <a:t>1</a:t>
+                      </a:r>
+                    </a:p>
+                  </a:txBody>
+                  <a:tcPr/>
+                </a:tc>
+                <a:tc>
+                  <a:txBody>
+                    <a:bodyPr/>
+                    <a:lstStyle/>
+                    <a:p>
+                      <a:pPr algn="ctr"/>
+                      <a:r>
+                        <a:rPr lang="en-US" dirty="0"/>
+                        <a:t>2</a:t>
+                      </a:r>
+                    </a:p>
+                  </a:txBody>
+                  <a:tcPr/>
+                </a:tc>
+                <a:tc>
+                  <a:txBody>
+                    <a:bodyPr/>
+                    <a:lstStyle/>
+                    <a:p>
+                      <a:pPr algn="ctr"/>
+                      <a:r>
+                        <a:rPr lang="en-US" dirty="0"/>
+                        <a:t>3</a:t>
+                      </a:r>
+                    </a:p>
+                  </a:txBody>
+                  <a:tcPr/>
+                </a:tc>
+                <a:tc>
+                  <a:txBody>
+                    <a:bodyPr/>
+                    <a:lstStyle/>
+                    <a:p>
+                      <a:pPr algn="ctr"/>
+                      <a:r>
+                        <a:rPr lang="en-US" dirty="0"/>
+                        <a:t>4</a:t>
+                      </a:r>
+                    </a:p>
+                  </a:txBody>
+                  <a:tcPr/>
+                </a:tc>
+                <a:tc>
+                  <a:txBody>
+                    <a:bodyPr/>
+                    <a:lstStyle/>
+                    <a:p>
+                      <a:pPr algn="ctr"/>
+                      <a:r>
+                        <a:rPr lang="en-US" dirty="0"/>
+                        <a:t>5</a:t>
+                      </a:r>
+                    </a:p>
+                  </a:txBody>
+                  <a:tcPr/>
+                </a:tc>
+                <a:tc>
+                  <a:txBody>
+                    <a:bodyPr/>
+                    <a:lstStyle/>
+                    <a:p>
+                      <a:pPr algn="ctr"/>
+                      <a:r>
+                        <a:rPr lang="en-US" dirty="0"/>
+                        <a:t>6</a:t>
+                      </a:r>
+                    </a:p>
+                  </a:txBody>
+                  <a:tcPr/>
+                </a:tc>
+                <a:extLst>
+                  <a:ext uri="{0D108BD9-81ED-4DB2-BD59-A6C34878D82A}">
+                    <a16:rowId xmlns:a16="http://schemas.microsoft.com/office/drawing/2014/main" val="3495024640"/>
+                  </a:ext>
+                </a:extLst>
+              </a:tr>
+              <a:tr h="370840">
+                <a:tc>
+                  <a:txBody>
+                    <a:bodyPr/>
+                    <a:lstStyle/>
+                    <a:p>
+                      <a:pPr algn="ctr"/>
+                      <a:r>
+                        <a:rPr lang="en-US" dirty="0"/>
+                        <a:t>12</a:t>
+                      </a:r>
+                    </a:p>
+                  </a:txBody>
+                  <a:tcPr/>
+                </a:tc>
+                <a:tc>
+                  <a:txBody>
+                    <a:bodyPr/>
+                    <a:lstStyle/>
+                    <a:p>
+                      <a:pPr algn="ctr"/>
+                      <a:r>
+                        <a:rPr lang="en-US" b="1" dirty="0">
+                          <a:solidFill>
+                            <a:srgbClr val="FF0000"/>
+                          </a:solidFill>
+                        </a:rPr>
+                        <a:t>8</a:t>
+                      </a:r>
+                    </a:p>
+                  </a:txBody>
+                  <a:tcPr/>
+                </a:tc>
+                <a:tc>
+                  <a:txBody>
+                    <a:bodyPr/>
+                    <a:lstStyle/>
+                    <a:p>
+                      <a:pPr algn="ctr"/>
+                      <a:r>
+                        <a:rPr lang="en-US" dirty="0"/>
+                        <a:t>15</a:t>
+                      </a:r>
+                    </a:p>
+                  </a:txBody>
+                  <a:tcPr/>
+                </a:tc>
+                <a:tc>
+                  <a:txBody>
+                    <a:bodyPr/>
+                    <a:lstStyle/>
+                    <a:p>
+                      <a:pPr algn="ctr"/>
+                      <a:r>
+                        <a:rPr lang="en-US" dirty="0"/>
+                        <a:t>14</a:t>
+                      </a:r>
+                    </a:p>
+                  </a:txBody>
+                  <a:tcPr/>
+                </a:tc>
+                <a:tc>
+                  <a:txBody>
+                    <a:bodyPr/>
+                    <a:lstStyle/>
+                    <a:p>
+                      <a:pPr algn="ctr"/>
+                      <a:endParaRPr lang="en-US" dirty="0"/>
+                    </a:p>
+                  </a:txBody>
+                  <a:tcPr/>
+                </a:tc>
+                <a:tc>
+                  <a:txBody>
+                    <a:bodyPr/>
+                    <a:lstStyle/>
+                    <a:p>
+                      <a:pPr algn="ctr"/>
+                      <a:r>
+                        <a:rPr lang="en-US" dirty="0"/>
+                        <a:t>5</a:t>
+                      </a:r>
+                    </a:p>
+                  </a:txBody>
+                  <a:tcPr/>
+                </a:tc>
+                <a:tc>
+                  <a:txBody>
+                    <a:bodyPr/>
+                    <a:lstStyle/>
+                    <a:p>
+                      <a:pPr algn="ctr"/>
+                      <a:r>
+                        <a:rPr lang="en-US" dirty="0"/>
+                        <a:t>6</a:t>
+                      </a:r>
+                    </a:p>
+                  </a:txBody>
+                  <a:tcPr/>
+                </a:tc>
+                <a:extLst>
+                  <a:ext uri="{0D108BD9-81ED-4DB2-BD59-A6C34878D82A}">
+                    <a16:rowId xmlns:a16="http://schemas.microsoft.com/office/drawing/2014/main" val="834830140"/>
+                  </a:ext>
+                </a:extLst>
+              </a:tr>
+            </a:tbl>
+          </a:graphicData>
+        </a:graphic>
+      </p:graphicFrame>
+      <p:sp>
+        <p:nvSpPr>
+          <p:cNvPr id="8" name="TextBox 7">
+            <a:extLst>
+              <a:ext uri="{FF2B5EF4-FFF2-40B4-BE49-F238E27FC236}">
+                <a16:creationId xmlns:a16="http://schemas.microsoft.com/office/drawing/2014/main" id="{6C34C011-1DCA-A05B-4288-99D49FFA5CE6}"/>
+              </a:ext>
+            </a:extLst>
+          </p:cNvPr>
+          <p:cNvSpPr txBox="1"/>
+          <p:nvPr/>
+        </p:nvSpPr>
+        <p:spPr>
+          <a:xfrm>
+            <a:off x="9787094" y="2505670"/>
+            <a:ext cx="2200589" cy="1200329"/>
+          </a:xfrm>
+          <a:prstGeom prst="rect">
+            <a:avLst/>
+          </a:prstGeom>
+          <a:solidFill>
+            <a:schemeClr val="accent2">
+              <a:lumMod val="40000"/>
+              <a:lumOff val="60000"/>
+            </a:schemeClr>
+          </a:solidFill>
+        </p:spPr>
+        <p:txBody>
+          <a:bodyPr wrap="square" rtlCol="0">
+            <a:spAutoFit/>
+          </a:bodyPr>
+          <a:lstStyle/>
+          <a:p>
+            <a:pPr algn="ctr"/>
+            <a:r>
+              <a:rPr lang="en-US" dirty="0"/>
+              <a:t>If you delete 8 and replace it with an empty slot, then you can’t find 15!</a:t>
+            </a:r>
+          </a:p>
+        </p:txBody>
+      </p:sp>
+      <p:sp>
+        <p:nvSpPr>
+          <p:cNvPr id="9" name="TextBox 8">
+            <a:extLst>
+              <a:ext uri="{FF2B5EF4-FFF2-40B4-BE49-F238E27FC236}">
+                <a16:creationId xmlns:a16="http://schemas.microsoft.com/office/drawing/2014/main" id="{B0FE9EC2-CCED-BE04-FEAF-F89AF9DF18C8}"/>
+              </a:ext>
+            </a:extLst>
+          </p:cNvPr>
+          <p:cNvSpPr txBox="1"/>
+          <p:nvPr/>
+        </p:nvSpPr>
+        <p:spPr>
+          <a:xfrm>
+            <a:off x="2558980" y="1467692"/>
+            <a:ext cx="1634531" cy="369332"/>
+          </a:xfrm>
+          <a:prstGeom prst="rect">
+            <a:avLst/>
+          </a:prstGeom>
+          <a:noFill/>
+        </p:spPr>
+        <p:txBody>
+          <a:bodyPr wrap="square" rtlCol="0">
+            <a:spAutoFit/>
+          </a:bodyPr>
+          <a:lstStyle/>
+          <a:p>
+            <a:r>
+              <a:rPr lang="en-US" dirty="0"/>
+              <a:t>h(k) = k mod 7</a:t>
+            </a:r>
+          </a:p>
+        </p:txBody>
+      </p:sp>
+      <p:graphicFrame>
+        <p:nvGraphicFramePr>
+          <p:cNvPr id="10" name="Table 9">
+            <a:extLst>
+              <a:ext uri="{FF2B5EF4-FFF2-40B4-BE49-F238E27FC236}">
+                <a16:creationId xmlns:a16="http://schemas.microsoft.com/office/drawing/2014/main" id="{67B1AC49-E946-3396-A6B3-9009294A1F12}"/>
+              </a:ext>
+            </a:extLst>
+          </p:cNvPr>
+          <p:cNvGraphicFramePr>
+            <a:graphicFrameLocks noGrp="1"/>
+          </p:cNvGraphicFramePr>
+          <p:nvPr>
+            <p:extLst>
+              <p:ext uri="{D42A27DB-BD31-4B8C-83A1-F6EECF244321}">
+                <p14:modId xmlns:p14="http://schemas.microsoft.com/office/powerpoint/2010/main" val="1137622194"/>
+              </p:ext>
+            </p:extLst>
+          </p:nvPr>
+        </p:nvGraphicFramePr>
+        <p:xfrm>
+          <a:off x="1090803" y="3263744"/>
+          <a:ext cx="8128001" cy="741680"/>
+        </p:xfrm>
+        <a:graphic>
+          <a:graphicData uri="http://schemas.openxmlformats.org/drawingml/2006/table">
+            <a:tbl>
+              <a:tblPr firstRow="1" bandRow="1">
+                <a:tableStyleId>{5C22544A-7EE6-4342-B048-85BDC9FD1C3A}</a:tableStyleId>
+              </a:tblPr>
+              <a:tblGrid>
+                <a:gridCol w="1161143">
+                  <a:extLst>
+                    <a:ext uri="{9D8B030D-6E8A-4147-A177-3AD203B41FA5}">
+                      <a16:colId xmlns:a16="http://schemas.microsoft.com/office/drawing/2014/main" val="676990233"/>
+                    </a:ext>
+                  </a:extLst>
+                </a:gridCol>
+                <a:gridCol w="1161143">
+                  <a:extLst>
+                    <a:ext uri="{9D8B030D-6E8A-4147-A177-3AD203B41FA5}">
+                      <a16:colId xmlns:a16="http://schemas.microsoft.com/office/drawing/2014/main" val="3312227759"/>
+                    </a:ext>
+                  </a:extLst>
+                </a:gridCol>
+                <a:gridCol w="1161143">
+                  <a:extLst>
+                    <a:ext uri="{9D8B030D-6E8A-4147-A177-3AD203B41FA5}">
+                      <a16:colId xmlns:a16="http://schemas.microsoft.com/office/drawing/2014/main" val="2786461669"/>
+                    </a:ext>
+                  </a:extLst>
+                </a:gridCol>
+                <a:gridCol w="1161143">
+                  <a:extLst>
+                    <a:ext uri="{9D8B030D-6E8A-4147-A177-3AD203B41FA5}">
+                      <a16:colId xmlns:a16="http://schemas.microsoft.com/office/drawing/2014/main" val="3275343878"/>
+                    </a:ext>
+                  </a:extLst>
+                </a:gridCol>
+                <a:gridCol w="1161143">
+                  <a:extLst>
+                    <a:ext uri="{9D8B030D-6E8A-4147-A177-3AD203B41FA5}">
+                      <a16:colId xmlns:a16="http://schemas.microsoft.com/office/drawing/2014/main" val="856231369"/>
+                    </a:ext>
+                  </a:extLst>
+                </a:gridCol>
+                <a:gridCol w="1161143">
+                  <a:extLst>
+                    <a:ext uri="{9D8B030D-6E8A-4147-A177-3AD203B41FA5}">
+                      <a16:colId xmlns:a16="http://schemas.microsoft.com/office/drawing/2014/main" val="3960613019"/>
+                    </a:ext>
+                  </a:extLst>
+                </a:gridCol>
+                <a:gridCol w="1161143">
+                  <a:extLst>
+                    <a:ext uri="{9D8B030D-6E8A-4147-A177-3AD203B41FA5}">
+                      <a16:colId xmlns:a16="http://schemas.microsoft.com/office/drawing/2014/main" val="2572298294"/>
+                    </a:ext>
+                  </a:extLst>
+                </a:gridCol>
+              </a:tblGrid>
+              <a:tr h="370840">
+                <a:tc>
+                  <a:txBody>
+                    <a:bodyPr/>
+                    <a:lstStyle/>
+                    <a:p>
+                      <a:pPr algn="ctr"/>
+                      <a:r>
+                        <a:rPr lang="en-US" dirty="0"/>
+                        <a:t>0</a:t>
+                      </a:r>
+                    </a:p>
+                  </a:txBody>
+                  <a:tcPr/>
+                </a:tc>
+                <a:tc>
+                  <a:txBody>
+                    <a:bodyPr/>
+                    <a:lstStyle/>
+                    <a:p>
+                      <a:pPr algn="ctr"/>
+                      <a:r>
+                        <a:rPr lang="en-US" dirty="0"/>
+                        <a:t>1</a:t>
+                      </a:r>
+                    </a:p>
+                  </a:txBody>
+                  <a:tcPr/>
+                </a:tc>
+                <a:tc>
+                  <a:txBody>
+                    <a:bodyPr/>
+                    <a:lstStyle/>
+                    <a:p>
+                      <a:pPr algn="ctr"/>
+                      <a:r>
+                        <a:rPr lang="en-US" dirty="0"/>
+                        <a:t>2</a:t>
+                      </a:r>
+                    </a:p>
+                  </a:txBody>
+                  <a:tcPr/>
+                </a:tc>
+                <a:tc>
+                  <a:txBody>
+                    <a:bodyPr/>
+                    <a:lstStyle/>
+                    <a:p>
+                      <a:pPr algn="ctr"/>
+                      <a:r>
+                        <a:rPr lang="en-US" dirty="0"/>
+                        <a:t>3</a:t>
+                      </a:r>
+                    </a:p>
+                  </a:txBody>
+                  <a:tcPr/>
+                </a:tc>
+                <a:tc>
+                  <a:txBody>
+                    <a:bodyPr/>
+                    <a:lstStyle/>
+                    <a:p>
+                      <a:pPr algn="ctr"/>
+                      <a:r>
+                        <a:rPr lang="en-US" dirty="0"/>
+                        <a:t>4</a:t>
+                      </a:r>
+                    </a:p>
+                  </a:txBody>
+                  <a:tcPr/>
+                </a:tc>
+                <a:tc>
+                  <a:txBody>
+                    <a:bodyPr/>
+                    <a:lstStyle/>
+                    <a:p>
+                      <a:pPr algn="ctr"/>
+                      <a:r>
+                        <a:rPr lang="en-US" dirty="0"/>
+                        <a:t>5</a:t>
+                      </a:r>
+                    </a:p>
+                  </a:txBody>
+                  <a:tcPr/>
+                </a:tc>
+                <a:tc>
+                  <a:txBody>
+                    <a:bodyPr/>
+                    <a:lstStyle/>
+                    <a:p>
+                      <a:pPr algn="ctr"/>
+                      <a:r>
+                        <a:rPr lang="en-US" dirty="0"/>
+                        <a:t>6</a:t>
+                      </a:r>
+                    </a:p>
+                  </a:txBody>
+                  <a:tcPr/>
+                </a:tc>
+                <a:extLst>
+                  <a:ext uri="{0D108BD9-81ED-4DB2-BD59-A6C34878D82A}">
+                    <a16:rowId xmlns:a16="http://schemas.microsoft.com/office/drawing/2014/main" val="3495024640"/>
+                  </a:ext>
+                </a:extLst>
+              </a:tr>
+              <a:tr h="370840">
+                <a:tc>
+                  <a:txBody>
+                    <a:bodyPr/>
+                    <a:lstStyle/>
+                    <a:p>
+                      <a:pPr algn="ctr"/>
+                      <a:r>
+                        <a:rPr lang="en-US" dirty="0"/>
+                        <a:t>12</a:t>
+                      </a:r>
+                    </a:p>
+                  </a:txBody>
+                  <a:tcPr/>
+                </a:tc>
+                <a:tc>
+                  <a:txBody>
+                    <a:bodyPr/>
+                    <a:lstStyle/>
+                    <a:p>
+                      <a:pPr algn="ctr"/>
+                      <a:endParaRPr lang="en-US" dirty="0"/>
+                    </a:p>
+                  </a:txBody>
+                  <a:tcPr/>
+                </a:tc>
+                <a:tc>
+                  <a:txBody>
+                    <a:bodyPr/>
+                    <a:lstStyle/>
+                    <a:p>
+                      <a:pPr algn="ctr"/>
+                      <a:r>
+                        <a:rPr lang="en-US" dirty="0"/>
+                        <a:t>15</a:t>
+                      </a:r>
+                    </a:p>
+                  </a:txBody>
+                  <a:tcPr/>
+                </a:tc>
+                <a:tc>
+                  <a:txBody>
+                    <a:bodyPr/>
+                    <a:lstStyle/>
+                    <a:p>
+                      <a:pPr algn="ctr"/>
+                      <a:r>
+                        <a:rPr lang="en-US" dirty="0"/>
+                        <a:t>14</a:t>
+                      </a:r>
+                    </a:p>
+                  </a:txBody>
+                  <a:tcPr/>
+                </a:tc>
+                <a:tc>
+                  <a:txBody>
+                    <a:bodyPr/>
+                    <a:lstStyle/>
+                    <a:p>
+                      <a:pPr algn="ctr"/>
+                      <a:endParaRPr lang="en-US" dirty="0"/>
+                    </a:p>
+                  </a:txBody>
+                  <a:tcPr/>
+                </a:tc>
+                <a:tc>
+                  <a:txBody>
+                    <a:bodyPr/>
+                    <a:lstStyle/>
+                    <a:p>
+                      <a:pPr algn="ctr"/>
+                      <a:r>
+                        <a:rPr lang="en-US" dirty="0"/>
+                        <a:t>5</a:t>
+                      </a:r>
+                    </a:p>
+                  </a:txBody>
+                  <a:tcPr/>
+                </a:tc>
+                <a:tc>
+                  <a:txBody>
+                    <a:bodyPr/>
+                    <a:lstStyle/>
+                    <a:p>
+                      <a:pPr algn="ctr"/>
+                      <a:r>
+                        <a:rPr lang="en-US" dirty="0"/>
+                        <a:t>6</a:t>
+                      </a:r>
+                    </a:p>
+                  </a:txBody>
+                  <a:tcPr/>
+                </a:tc>
+                <a:extLst>
+                  <a:ext uri="{0D108BD9-81ED-4DB2-BD59-A6C34878D82A}">
+                    <a16:rowId xmlns:a16="http://schemas.microsoft.com/office/drawing/2014/main" val="834830140"/>
+                  </a:ext>
+                </a:extLst>
+              </a:tr>
+            </a:tbl>
+          </a:graphicData>
+        </a:graphic>
+      </p:graphicFrame>
+      <p:graphicFrame>
+        <p:nvGraphicFramePr>
+          <p:cNvPr id="11" name="Table 10">
+            <a:extLst>
+              <a:ext uri="{FF2B5EF4-FFF2-40B4-BE49-F238E27FC236}">
+                <a16:creationId xmlns:a16="http://schemas.microsoft.com/office/drawing/2014/main" id="{C17C5887-766B-D890-B20A-45CD021ACB81}"/>
+              </a:ext>
+            </a:extLst>
+          </p:cNvPr>
+          <p:cNvGraphicFramePr>
+            <a:graphicFrameLocks noGrp="1"/>
+          </p:cNvGraphicFramePr>
+          <p:nvPr>
+            <p:extLst>
+              <p:ext uri="{D42A27DB-BD31-4B8C-83A1-F6EECF244321}">
+                <p14:modId xmlns:p14="http://schemas.microsoft.com/office/powerpoint/2010/main" val="3470572380"/>
+              </p:ext>
+            </p:extLst>
+          </p:nvPr>
+        </p:nvGraphicFramePr>
+        <p:xfrm>
+          <a:off x="1090802" y="4822914"/>
+          <a:ext cx="8128001" cy="741680"/>
+        </p:xfrm>
+        <a:graphic>
+          <a:graphicData uri="http://schemas.openxmlformats.org/drawingml/2006/table">
+            <a:tbl>
+              <a:tblPr firstRow="1" bandRow="1">
+                <a:tableStyleId>{5C22544A-7EE6-4342-B048-85BDC9FD1C3A}</a:tableStyleId>
+              </a:tblPr>
+              <a:tblGrid>
+                <a:gridCol w="1161143">
+                  <a:extLst>
+                    <a:ext uri="{9D8B030D-6E8A-4147-A177-3AD203B41FA5}">
+                      <a16:colId xmlns:a16="http://schemas.microsoft.com/office/drawing/2014/main" val="676990233"/>
+                    </a:ext>
+                  </a:extLst>
+                </a:gridCol>
+                <a:gridCol w="1161143">
+                  <a:extLst>
+                    <a:ext uri="{9D8B030D-6E8A-4147-A177-3AD203B41FA5}">
+                      <a16:colId xmlns:a16="http://schemas.microsoft.com/office/drawing/2014/main" val="3312227759"/>
+                    </a:ext>
+                  </a:extLst>
+                </a:gridCol>
+                <a:gridCol w="1161143">
+                  <a:extLst>
+                    <a:ext uri="{9D8B030D-6E8A-4147-A177-3AD203B41FA5}">
+                      <a16:colId xmlns:a16="http://schemas.microsoft.com/office/drawing/2014/main" val="2786461669"/>
+                    </a:ext>
+                  </a:extLst>
+                </a:gridCol>
+                <a:gridCol w="1161143">
+                  <a:extLst>
+                    <a:ext uri="{9D8B030D-6E8A-4147-A177-3AD203B41FA5}">
+                      <a16:colId xmlns:a16="http://schemas.microsoft.com/office/drawing/2014/main" val="3275343878"/>
+                    </a:ext>
+                  </a:extLst>
+                </a:gridCol>
+                <a:gridCol w="1161143">
+                  <a:extLst>
+                    <a:ext uri="{9D8B030D-6E8A-4147-A177-3AD203B41FA5}">
+                      <a16:colId xmlns:a16="http://schemas.microsoft.com/office/drawing/2014/main" val="856231369"/>
+                    </a:ext>
+                  </a:extLst>
+                </a:gridCol>
+                <a:gridCol w="1161143">
+                  <a:extLst>
+                    <a:ext uri="{9D8B030D-6E8A-4147-A177-3AD203B41FA5}">
+                      <a16:colId xmlns:a16="http://schemas.microsoft.com/office/drawing/2014/main" val="3960613019"/>
+                    </a:ext>
+                  </a:extLst>
+                </a:gridCol>
+                <a:gridCol w="1161143">
+                  <a:extLst>
+                    <a:ext uri="{9D8B030D-6E8A-4147-A177-3AD203B41FA5}">
+                      <a16:colId xmlns:a16="http://schemas.microsoft.com/office/drawing/2014/main" val="2572298294"/>
+                    </a:ext>
+                  </a:extLst>
+                </a:gridCol>
+              </a:tblGrid>
+              <a:tr h="370840">
+                <a:tc>
+                  <a:txBody>
+                    <a:bodyPr/>
+                    <a:lstStyle/>
+                    <a:p>
+                      <a:pPr algn="ctr"/>
+                      <a:r>
+                        <a:rPr lang="en-US" dirty="0"/>
+                        <a:t>0</a:t>
+                      </a:r>
+                    </a:p>
+                  </a:txBody>
+                  <a:tcPr/>
+                </a:tc>
+                <a:tc>
+                  <a:txBody>
+                    <a:bodyPr/>
+                    <a:lstStyle/>
+                    <a:p>
+                      <a:pPr algn="ctr"/>
+                      <a:r>
+                        <a:rPr lang="en-US" dirty="0"/>
+                        <a:t>1</a:t>
+                      </a:r>
+                    </a:p>
+                  </a:txBody>
+                  <a:tcPr/>
+                </a:tc>
+                <a:tc>
+                  <a:txBody>
+                    <a:bodyPr/>
+                    <a:lstStyle/>
+                    <a:p>
+                      <a:pPr algn="ctr"/>
+                      <a:r>
+                        <a:rPr lang="en-US" dirty="0"/>
+                        <a:t>2</a:t>
+                      </a:r>
+                    </a:p>
+                  </a:txBody>
+                  <a:tcPr/>
+                </a:tc>
+                <a:tc>
+                  <a:txBody>
+                    <a:bodyPr/>
+                    <a:lstStyle/>
+                    <a:p>
+                      <a:pPr algn="ctr"/>
+                      <a:r>
+                        <a:rPr lang="en-US" dirty="0"/>
+                        <a:t>3</a:t>
+                      </a:r>
+                    </a:p>
+                  </a:txBody>
+                  <a:tcPr/>
+                </a:tc>
+                <a:tc>
+                  <a:txBody>
+                    <a:bodyPr/>
+                    <a:lstStyle/>
+                    <a:p>
+                      <a:pPr algn="ctr"/>
+                      <a:r>
+                        <a:rPr lang="en-US" dirty="0"/>
+                        <a:t>4</a:t>
+                      </a:r>
+                    </a:p>
+                  </a:txBody>
+                  <a:tcPr/>
+                </a:tc>
+                <a:tc>
+                  <a:txBody>
+                    <a:bodyPr/>
+                    <a:lstStyle/>
+                    <a:p>
+                      <a:pPr algn="ctr"/>
+                      <a:r>
+                        <a:rPr lang="en-US" dirty="0"/>
+                        <a:t>5</a:t>
+                      </a:r>
+                    </a:p>
+                  </a:txBody>
+                  <a:tcPr/>
+                </a:tc>
+                <a:tc>
+                  <a:txBody>
+                    <a:bodyPr/>
+                    <a:lstStyle/>
+                    <a:p>
+                      <a:pPr algn="ctr"/>
+                      <a:r>
+                        <a:rPr lang="en-US" dirty="0"/>
+                        <a:t>6</a:t>
+                      </a:r>
+                    </a:p>
+                  </a:txBody>
+                  <a:tcPr/>
+                </a:tc>
+                <a:extLst>
+                  <a:ext uri="{0D108BD9-81ED-4DB2-BD59-A6C34878D82A}">
+                    <a16:rowId xmlns:a16="http://schemas.microsoft.com/office/drawing/2014/main" val="3495024640"/>
+                  </a:ext>
+                </a:extLst>
+              </a:tr>
+              <a:tr h="370840">
+                <a:tc>
+                  <a:txBody>
+                    <a:bodyPr/>
+                    <a:lstStyle/>
+                    <a:p>
+                      <a:pPr algn="ctr"/>
+                      <a:r>
+                        <a:rPr lang="en-US" dirty="0"/>
+                        <a:t>12</a:t>
+                      </a:r>
+                    </a:p>
+                  </a:txBody>
+                  <a:tcPr/>
+                </a:tc>
+                <a:tc>
+                  <a:txBody>
+                    <a:bodyPr/>
+                    <a:lstStyle/>
+                    <a:p>
+                      <a:pPr algn="ctr"/>
+                      <a:endParaRPr lang="en-US" dirty="0"/>
+                    </a:p>
+                  </a:txBody>
+                  <a:tcPr/>
+                </a:tc>
+                <a:tc>
+                  <a:txBody>
+                    <a:bodyPr/>
+                    <a:lstStyle/>
+                    <a:p>
+                      <a:pPr algn="ctr"/>
+                      <a:r>
+                        <a:rPr lang="en-US" dirty="0"/>
+                        <a:t>15</a:t>
+                      </a:r>
+                    </a:p>
+                  </a:txBody>
+                  <a:tcPr/>
+                </a:tc>
+                <a:tc>
+                  <a:txBody>
+                    <a:bodyPr/>
+                    <a:lstStyle/>
+                    <a:p>
+                      <a:pPr algn="ctr"/>
+                      <a:r>
+                        <a:rPr lang="en-US" dirty="0"/>
+                        <a:t>14</a:t>
+                      </a:r>
+                    </a:p>
+                  </a:txBody>
+                  <a:tcPr/>
+                </a:tc>
+                <a:tc>
+                  <a:txBody>
+                    <a:bodyPr/>
+                    <a:lstStyle/>
+                    <a:p>
+                      <a:pPr algn="ctr"/>
+                      <a:endParaRPr lang="en-US" dirty="0"/>
+                    </a:p>
+                  </a:txBody>
+                  <a:tcPr/>
+                </a:tc>
+                <a:tc>
+                  <a:txBody>
+                    <a:bodyPr/>
+                    <a:lstStyle/>
+                    <a:p>
+                      <a:pPr algn="ctr"/>
+                      <a:r>
+                        <a:rPr lang="en-US" dirty="0"/>
+                        <a:t>5</a:t>
+                      </a:r>
+                    </a:p>
+                  </a:txBody>
+                  <a:tcPr/>
+                </a:tc>
+                <a:tc>
+                  <a:txBody>
+                    <a:bodyPr/>
+                    <a:lstStyle/>
+                    <a:p>
+                      <a:pPr algn="ctr"/>
+                      <a:r>
+                        <a:rPr lang="en-US" dirty="0"/>
+                        <a:t>6</a:t>
+                      </a:r>
+                    </a:p>
+                  </a:txBody>
+                  <a:tcPr/>
+                </a:tc>
+                <a:extLst>
+                  <a:ext uri="{0D108BD9-81ED-4DB2-BD59-A6C34878D82A}">
+                    <a16:rowId xmlns:a16="http://schemas.microsoft.com/office/drawing/2014/main" val="834830140"/>
+                  </a:ext>
+                </a:extLst>
+              </a:tr>
+            </a:tbl>
+          </a:graphicData>
+        </a:graphic>
+      </p:graphicFrame>
+      <p:sp>
+        <p:nvSpPr>
+          <p:cNvPr id="7" name="Delay 6">
+            <a:extLst>
+              <a:ext uri="{FF2B5EF4-FFF2-40B4-BE49-F238E27FC236}">
+                <a16:creationId xmlns:a16="http://schemas.microsoft.com/office/drawing/2014/main" id="{E0B7FB12-38EE-5A86-E557-4992EAFA9898}"/>
+              </a:ext>
+            </a:extLst>
+          </p:cNvPr>
+          <p:cNvSpPr/>
+          <p:nvPr/>
+        </p:nvSpPr>
+        <p:spPr>
+          <a:xfrm rot="16200000">
+            <a:off x="2715129" y="5270916"/>
+            <a:ext cx="277352" cy="238784"/>
+          </a:xfrm>
+          <a:prstGeom prst="flowChartDelay">
+            <a:avLst/>
+          </a:prstGeom>
+          <a:solidFill>
+            <a:srgbClr val="FF0000"/>
+          </a:solidFill>
+          <a:ln>
+            <a:noFill/>
+          </a:ln>
+        </p:spPr>
+        <p:style>
+          <a:lnRef idx="2">
+            <a:schemeClr val="accent1">
+              <a:shade val="15000"/>
+            </a:schemeClr>
+          </a:lnRef>
+          <a:fillRef idx="1">
+            <a:schemeClr val="accent1"/>
+          </a:fillRef>
+          <a:effectRef idx="0">
+            <a:schemeClr val="accent1"/>
+          </a:effectRef>
+          <a:fontRef idx="minor">
+            <a:schemeClr val="lt1"/>
+          </a:fontRef>
+        </p:style>
+        <p:txBody>
+          <a:bodyPr rtlCol="0" anchor="ctr"/>
+          <a:lstStyle/>
+          <a:p>
+            <a:pPr algn="ctr"/>
+            <a:endParaRPr lang="en-US"/>
+          </a:p>
+        </p:txBody>
+      </p:sp>
+      <p:sp>
+        <p:nvSpPr>
+          <p:cNvPr id="12" name="TextBox 11">
+            <a:extLst>
+              <a:ext uri="{FF2B5EF4-FFF2-40B4-BE49-F238E27FC236}">
+                <a16:creationId xmlns:a16="http://schemas.microsoft.com/office/drawing/2014/main" id="{8E3A59A8-6D9B-258F-C224-09AA39433572}"/>
+              </a:ext>
+            </a:extLst>
+          </p:cNvPr>
+          <p:cNvSpPr txBox="1"/>
+          <p:nvPr/>
+        </p:nvSpPr>
+        <p:spPr>
+          <a:xfrm>
+            <a:off x="2973197" y="5805796"/>
+            <a:ext cx="3374573" cy="923330"/>
+          </a:xfrm>
+          <a:prstGeom prst="rect">
+            <a:avLst/>
+          </a:prstGeom>
+          <a:solidFill>
+            <a:schemeClr val="accent2">
+              <a:lumMod val="40000"/>
+              <a:lumOff val="60000"/>
+            </a:schemeClr>
+          </a:solidFill>
+        </p:spPr>
+        <p:txBody>
+          <a:bodyPr wrap="square" rtlCol="0">
+            <a:spAutoFit/>
+          </a:bodyPr>
+          <a:lstStyle/>
+          <a:p>
+            <a:pPr algn="ctr"/>
+            <a:r>
+              <a:rPr lang="en-US" dirty="0"/>
+              <a:t>Instead, flag it has “deleted” but not empty, so that the chain of elements is not broken.</a:t>
+            </a:r>
+          </a:p>
+        </p:txBody>
+      </p:sp>
+    </p:spTree>
+    <p:extLst>
+      <p:ext uri="{BB962C8B-B14F-4D97-AF65-F5344CB8AC3E}">
+        <p14:creationId xmlns:p14="http://schemas.microsoft.com/office/powerpoint/2010/main" val="200806696"/>
+      </p:ext>
+    </p:extLst>
+  </p:cSld>
+  <p:clrMapOvr>
+    <a:masterClrMapping/>
+  </p:clrMapOvr>
+</p:sld>
+</file>
+
+<file path=ppt/slides/slide28.xml><?xml version="1.0" encoding="utf-8"?>
 <p:sld xmlns:a="http://schemas.openxmlformats.org/drawingml/2006/main" xmlns:r="http://schemas.openxmlformats.org/officeDocument/2006/relationships" xmlns:p="http://schemas.openxmlformats.org/presentationml/2006/main">
   <p:cSld>
     <p:spTree>
@@ -14232,7 +15478,7 @@
 </p:sld>
 </file>
 
-<file path=ppt/slides/slide27.xml><?xml version="1.0" encoding="utf-8"?>
+<file path=ppt/slides/slide29.xml><?xml version="1.0" encoding="utf-8"?>
 <p:sld xmlns:a="http://schemas.openxmlformats.org/drawingml/2006/main" xmlns:r="http://schemas.openxmlformats.org/officeDocument/2006/relationships" xmlns:p="http://schemas.openxmlformats.org/presentationml/2006/main">
   <p:cSld>
     <p:spTree>
@@ -14432,7 +15678,1174 @@
 </p:sld>
 </file>
 
-<file path=ppt/slides/slide28.xml><?xml version="1.0" encoding="utf-8"?>
+<file path=ppt/slides/slide3.xml><?xml version="1.0" encoding="utf-8"?>
+<p:sld xmlns:a="http://schemas.openxmlformats.org/drawingml/2006/main" xmlns:r="http://schemas.openxmlformats.org/officeDocument/2006/relationships" xmlns:p="http://schemas.openxmlformats.org/presentationml/2006/main">
+  <p:cSld>
+    <p:spTree>
+      <p:nvGrpSpPr>
+        <p:cNvPr id="1" name=""/>
+        <p:cNvGrpSpPr/>
+        <p:nvPr/>
+      </p:nvGrpSpPr>
+      <p:grpSpPr>
+        <a:xfrm>
+          <a:off x="0" y="0"/>
+          <a:ext cx="0" cy="0"/>
+          <a:chOff x="0" y="0"/>
+          <a:chExt cx="0" cy="0"/>
+        </a:xfrm>
+      </p:grpSpPr>
+      <mc:AlternateContent xmlns:mc="http://schemas.openxmlformats.org/markup-compatibility/2006">
+        <mc:Choice xmlns:a14="http://schemas.microsoft.com/office/drawing/2010/main" Requires="a14">
+          <p:sp>
+            <p:nvSpPr>
+              <p:cNvPr id="2" name="Title 1">
+                <a:extLst>
+                  <a:ext uri="{FF2B5EF4-FFF2-40B4-BE49-F238E27FC236}">
+                    <a16:creationId xmlns:a16="http://schemas.microsoft.com/office/drawing/2014/main" id="{262E61BC-3BAE-3BB0-49D9-78488839A353}"/>
+                  </a:ext>
+                </a:extLst>
+              </p:cNvPr>
+              <p:cNvSpPr>
+                <a:spLocks noGrp="1"/>
+              </p:cNvSpPr>
+              <p:nvPr>
+                <p:ph type="title"/>
+              </p:nvPr>
+            </p:nvSpPr>
+            <p:spPr/>
+            <p:txBody>
+              <a:bodyPr/>
+              <a:lstStyle/>
+              <a:p>
+                <a:r>
+                  <a:rPr lang="en-US" dirty="0"/>
+                  <a:t>Why Are Heaps height </a:t>
+                </a:r>
+                <a14:m>
+                  <m:oMath xmlns:m="http://schemas.openxmlformats.org/officeDocument/2006/math">
+                    <m:func>
+                      <m:funcPr>
+                        <m:ctrlPr>
+                          <a:rPr lang="en-US" i="1" smtClean="0">
+                            <a:latin typeface="Cambria Math" panose="02040503050406030204" pitchFamily="18" charset="0"/>
+                          </a:rPr>
+                        </m:ctrlPr>
+                      </m:funcPr>
+                      <m:fName>
+                        <m:r>
+                          <m:rPr>
+                            <m:sty m:val="p"/>
+                          </m:rPr>
+                          <a:rPr lang="en-US" i="0" smtClean="0">
+                            <a:latin typeface="Cambria Math" panose="02040503050406030204" pitchFamily="18" charset="0"/>
+                          </a:rPr>
+                          <m:t>log</m:t>
+                        </m:r>
+                      </m:fName>
+                      <m:e>
+                        <m:r>
+                          <a:rPr lang="en-CA" b="0" i="1" smtClean="0">
+                            <a:latin typeface="Cambria Math" panose="02040503050406030204" pitchFamily="18" charset="0"/>
+                          </a:rPr>
+                          <m:t>𝑛</m:t>
+                        </m:r>
+                      </m:e>
+                    </m:func>
+                  </m:oMath>
+                </a14:m>
+                <a:r>
+                  <a:rPr lang="en-US" dirty="0"/>
+                  <a:t>? </a:t>
+                </a:r>
+              </a:p>
+            </p:txBody>
+          </p:sp>
+        </mc:Choice>
+        <mc:Fallback>
+          <p:sp>
+            <p:nvSpPr>
+              <p:cNvPr id="2" name="Title 1">
+                <a:extLst>
+                  <a:ext uri="{FF2B5EF4-FFF2-40B4-BE49-F238E27FC236}">
+                    <a16:creationId xmlns:a16="http://schemas.microsoft.com/office/drawing/2014/main" id="{262E61BC-3BAE-3BB0-49D9-78488839A353}"/>
+                  </a:ext>
+                </a:extLst>
+              </p:cNvPr>
+              <p:cNvSpPr>
+                <a:spLocks noGrp="1" noRot="1" noChangeAspect="1" noMove="1" noResize="1" noEditPoints="1" noAdjustHandles="1" noChangeArrowheads="1" noChangeShapeType="1" noTextEdit="1"/>
+              </p:cNvSpPr>
+              <p:nvPr>
+                <p:ph type="title"/>
+              </p:nvPr>
+            </p:nvSpPr>
+            <p:spPr>
+              <a:blipFill>
+                <a:blip r:embed="rId2"/>
+                <a:stretch>
+                  <a:fillRect l="-2413"/>
+                </a:stretch>
+              </a:blipFill>
+            </p:spPr>
+            <p:txBody>
+              <a:bodyPr/>
+              <a:lstStyle/>
+              <a:p>
+                <a:r>
+                  <a:rPr lang="en-US">
+                    <a:noFill/>
+                  </a:rPr>
+                  <a:t> </a:t>
+                </a:r>
+              </a:p>
+            </p:txBody>
+          </p:sp>
+        </mc:Fallback>
+      </mc:AlternateContent>
+      <mc:AlternateContent xmlns:mc="http://schemas.openxmlformats.org/markup-compatibility/2006">
+        <mc:Choice xmlns:a14="http://schemas.microsoft.com/office/drawing/2010/main" Requires="a14">
+          <p:sp>
+            <p:nvSpPr>
+              <p:cNvPr id="3" name="Content Placeholder 2">
+                <a:extLst>
+                  <a:ext uri="{FF2B5EF4-FFF2-40B4-BE49-F238E27FC236}">
+                    <a16:creationId xmlns:a16="http://schemas.microsoft.com/office/drawing/2014/main" id="{B8C0F48B-B380-4251-F7BA-F921B6C0BB5E}"/>
+                  </a:ext>
+                </a:extLst>
+              </p:cNvPr>
+              <p:cNvSpPr>
+                <a:spLocks noGrp="1"/>
+              </p:cNvSpPr>
+              <p:nvPr>
+                <p:ph idx="1"/>
+              </p:nvPr>
+            </p:nvSpPr>
+            <p:spPr/>
+            <p:txBody>
+              <a:bodyPr>
+                <a:normAutofit fontScale="92500" lnSpcReduction="10000"/>
+              </a:bodyPr>
+              <a:lstStyle/>
+              <a:p>
+                <a:r>
+                  <a:rPr lang="en-US" dirty="0"/>
+                  <a:t>A </a:t>
+                </a:r>
+                <a:r>
+                  <a:rPr lang="en-US" b="1" dirty="0"/>
+                  <a:t>perfect binary tree </a:t>
+                </a:r>
+                <a:r>
+                  <a:rPr lang="en-US" dirty="0"/>
+                  <a:t>of height </a:t>
+                </a:r>
+                <a14:m>
+                  <m:oMath xmlns:m="http://schemas.openxmlformats.org/officeDocument/2006/math">
+                    <m:r>
+                      <a:rPr lang="en-US" i="1" dirty="0" smtClean="0">
+                        <a:latin typeface="Cambria Math" panose="02040503050406030204" pitchFamily="18" charset="0"/>
+                      </a:rPr>
+                      <m:t>h</m:t>
+                    </m:r>
+                  </m:oMath>
+                </a14:m>
+                <a:r>
+                  <a:rPr lang="en-US" dirty="0"/>
+                  <a:t> can has </a:t>
+                </a:r>
+                <a14:m>
+                  <m:oMath xmlns:m="http://schemas.openxmlformats.org/officeDocument/2006/math">
+                    <m:sSup>
+                      <m:sSupPr>
+                        <m:ctrlPr>
+                          <a:rPr lang="en-US" i="1" smtClean="0">
+                            <a:latin typeface="Cambria Math" panose="02040503050406030204" pitchFamily="18" charset="0"/>
+                          </a:rPr>
+                        </m:ctrlPr>
+                      </m:sSupPr>
+                      <m:e>
+                        <m:r>
+                          <a:rPr lang="en-CA" b="0" i="1" smtClean="0">
+                            <a:latin typeface="Cambria Math" panose="02040503050406030204" pitchFamily="18" charset="0"/>
+                          </a:rPr>
+                          <m:t>2</m:t>
+                        </m:r>
+                      </m:e>
+                      <m:sup>
+                        <m:r>
+                          <a:rPr lang="en-CA" b="0" i="1" smtClean="0">
+                            <a:latin typeface="Cambria Math" panose="02040503050406030204" pitchFamily="18" charset="0"/>
+                          </a:rPr>
+                          <m:t>h</m:t>
+                        </m:r>
+                        <m:r>
+                          <a:rPr lang="en-CA" b="0" i="1" smtClean="0">
+                            <a:latin typeface="Cambria Math" panose="02040503050406030204" pitchFamily="18" charset="0"/>
+                          </a:rPr>
+                          <m:t>+1</m:t>
+                        </m:r>
+                      </m:sup>
+                    </m:sSup>
+                    <m:r>
+                      <a:rPr lang="en-CA" b="0" i="1" smtClean="0">
+                        <a:latin typeface="Cambria Math" panose="02040503050406030204" pitchFamily="18" charset="0"/>
+                      </a:rPr>
+                      <m:t>−1</m:t>
+                    </m:r>
+                  </m:oMath>
+                </a14:m>
+                <a:r>
+                  <a:rPr lang="en-US" dirty="0"/>
+                  <a:t> nodes</a:t>
+                </a:r>
+              </a:p>
+              <a:p>
+                <a:pPr lvl="1"/>
+                <a:r>
+                  <a:rPr lang="en-US" dirty="0"/>
+                  <a:t>Check this by counting nodes in examples … the pattern should be clear</a:t>
+                </a:r>
+              </a:p>
+              <a:p>
+                <a:r>
+                  <a:rPr lang="en-US" dirty="0"/>
+                  <a:t>A </a:t>
+                </a:r>
+                <a:r>
+                  <a:rPr lang="en-US" b="1" dirty="0"/>
+                  <a:t>complete binary tree </a:t>
+                </a:r>
+                <a:r>
+                  <a:rPr lang="en-US" dirty="0"/>
+                  <a:t>of height </a:t>
+                </a:r>
+                <a14:m>
+                  <m:oMath xmlns:m="http://schemas.openxmlformats.org/officeDocument/2006/math">
+                    <m:r>
+                      <a:rPr lang="en-US" i="1" dirty="0" smtClean="0">
+                        <a:latin typeface="Cambria Math" panose="02040503050406030204" pitchFamily="18" charset="0"/>
+                      </a:rPr>
+                      <m:t>h</m:t>
+                    </m:r>
+                  </m:oMath>
+                </a14:m>
+                <a:r>
+                  <a:rPr lang="en-US" dirty="0"/>
+                  <a:t> has between </a:t>
+                </a:r>
+                <a14:m>
+                  <m:oMath xmlns:m="http://schemas.openxmlformats.org/officeDocument/2006/math">
+                    <m:sSup>
+                      <m:sSupPr>
+                        <m:ctrlPr>
+                          <a:rPr lang="en-US" i="1" smtClean="0">
+                            <a:latin typeface="Cambria Math" panose="02040503050406030204" pitchFamily="18" charset="0"/>
+                          </a:rPr>
+                        </m:ctrlPr>
+                      </m:sSupPr>
+                      <m:e>
+                        <m:r>
+                          <a:rPr lang="en-CA" b="0" i="1" smtClean="0">
+                            <a:latin typeface="Cambria Math" panose="02040503050406030204" pitchFamily="18" charset="0"/>
+                          </a:rPr>
+                          <m:t>2</m:t>
+                        </m:r>
+                      </m:e>
+                      <m:sup>
+                        <m:r>
+                          <a:rPr lang="en-CA" b="0" i="1" smtClean="0">
+                            <a:latin typeface="Cambria Math" panose="02040503050406030204" pitchFamily="18" charset="0"/>
+                          </a:rPr>
+                          <m:t>h</m:t>
+                        </m:r>
+                      </m:sup>
+                    </m:sSup>
+                  </m:oMath>
+                </a14:m>
+                <a:r>
+                  <a:rPr lang="en-US" dirty="0"/>
+                  <a:t> and </a:t>
+                </a:r>
+                <a14:m>
+                  <m:oMath xmlns:m="http://schemas.openxmlformats.org/officeDocument/2006/math">
+                    <m:sSup>
+                      <m:sSupPr>
+                        <m:ctrlPr>
+                          <a:rPr lang="en-US" i="1" smtClean="0">
+                            <a:latin typeface="Cambria Math" panose="02040503050406030204" pitchFamily="18" charset="0"/>
+                          </a:rPr>
+                        </m:ctrlPr>
+                      </m:sSupPr>
+                      <m:e>
+                        <m:r>
+                          <a:rPr lang="en-CA" b="0" i="1" smtClean="0">
+                            <a:latin typeface="Cambria Math" panose="02040503050406030204" pitchFamily="18" charset="0"/>
+                          </a:rPr>
+                          <m:t>2</m:t>
+                        </m:r>
+                      </m:e>
+                      <m:sup>
+                        <m:r>
+                          <a:rPr lang="en-CA" b="0" i="1" smtClean="0">
+                            <a:latin typeface="Cambria Math" panose="02040503050406030204" pitchFamily="18" charset="0"/>
+                          </a:rPr>
+                          <m:t>h</m:t>
+                        </m:r>
+                        <m:r>
+                          <a:rPr lang="en-CA" b="0" i="1" smtClean="0">
+                            <a:latin typeface="Cambria Math" panose="02040503050406030204" pitchFamily="18" charset="0"/>
+                          </a:rPr>
+                          <m:t>+1</m:t>
+                        </m:r>
+                      </m:sup>
+                    </m:sSup>
+                    <m:r>
+                      <a:rPr lang="en-CA" b="0" i="1" smtClean="0">
+                        <a:latin typeface="Cambria Math" panose="02040503050406030204" pitchFamily="18" charset="0"/>
+                      </a:rPr>
+                      <m:t>−1</m:t>
+                    </m:r>
+                  </m:oMath>
+                </a14:m>
+                <a:r>
+                  <a:rPr lang="en-US" dirty="0"/>
+                  <a:t> nodes</a:t>
+                </a:r>
+              </a:p>
+              <a:p>
+                <a:r>
+                  <a:rPr lang="en-US" dirty="0"/>
+                  <a:t>Therefore: </a:t>
+                </a:r>
+              </a:p>
+              <a:p>
+                <a:pPr lvl="1"/>
+                <a14:m>
+                  <m:oMath xmlns:m="http://schemas.openxmlformats.org/officeDocument/2006/math">
+                    <m:sSup>
+                      <m:sSupPr>
+                        <m:ctrlPr>
+                          <a:rPr lang="en-CA" b="0" i="1" smtClean="0">
+                            <a:latin typeface="Cambria Math" panose="02040503050406030204" pitchFamily="18" charset="0"/>
+                          </a:rPr>
+                        </m:ctrlPr>
+                      </m:sSupPr>
+                      <m:e>
+                        <m:r>
+                          <a:rPr lang="en-CA" b="0" i="1" smtClean="0">
+                            <a:latin typeface="Cambria Math" panose="02040503050406030204" pitchFamily="18" charset="0"/>
+                          </a:rPr>
+                          <m:t>2</m:t>
+                        </m:r>
+                      </m:e>
+                      <m:sup>
+                        <m:r>
+                          <a:rPr lang="en-CA" b="0" i="1" smtClean="0">
+                            <a:latin typeface="Cambria Math" panose="02040503050406030204" pitchFamily="18" charset="0"/>
+                          </a:rPr>
+                          <m:t>h</m:t>
+                        </m:r>
+                      </m:sup>
+                    </m:sSup>
+                    <m:r>
+                      <a:rPr lang="en-CA" b="0" i="1" smtClean="0">
+                        <a:latin typeface="Cambria Math" panose="02040503050406030204" pitchFamily="18" charset="0"/>
+                      </a:rPr>
+                      <m:t>≤</m:t>
+                    </m:r>
+                    <m:r>
+                      <a:rPr lang="en-CA" b="0" i="1" smtClean="0">
+                        <a:latin typeface="Cambria Math" panose="02040503050406030204" pitchFamily="18" charset="0"/>
+                      </a:rPr>
+                      <m:t>𝑛</m:t>
+                    </m:r>
+                    <m:r>
+                      <a:rPr lang="en-CA" b="0" i="1" smtClean="0">
+                        <a:latin typeface="Cambria Math" panose="02040503050406030204" pitchFamily="18" charset="0"/>
+                      </a:rPr>
+                      <m:t>≤</m:t>
+                    </m:r>
+                    <m:sSup>
+                      <m:sSupPr>
+                        <m:ctrlPr>
+                          <a:rPr lang="en-US" b="0" i="1" smtClean="0">
+                            <a:latin typeface="Cambria Math" panose="02040503050406030204" pitchFamily="18" charset="0"/>
+                          </a:rPr>
+                        </m:ctrlPr>
+                      </m:sSupPr>
+                      <m:e>
+                        <m:r>
+                          <a:rPr lang="en-CA" b="0" i="1" smtClean="0">
+                            <a:latin typeface="Cambria Math" panose="02040503050406030204" pitchFamily="18" charset="0"/>
+                          </a:rPr>
+                          <m:t>2</m:t>
+                        </m:r>
+                      </m:e>
+                      <m:sup>
+                        <m:r>
+                          <a:rPr lang="en-CA" b="0" i="1" smtClean="0">
+                            <a:latin typeface="Cambria Math" panose="02040503050406030204" pitchFamily="18" charset="0"/>
+                          </a:rPr>
+                          <m:t>h</m:t>
+                        </m:r>
+                        <m:r>
+                          <a:rPr lang="en-CA" b="0" i="1" smtClean="0">
+                            <a:latin typeface="Cambria Math" panose="02040503050406030204" pitchFamily="18" charset="0"/>
+                          </a:rPr>
+                          <m:t>+1</m:t>
+                        </m:r>
+                      </m:sup>
+                    </m:sSup>
+                    <m:r>
+                      <a:rPr lang="en-CA" b="0" i="1" smtClean="0">
+                        <a:latin typeface="Cambria Math" panose="02040503050406030204" pitchFamily="18" charset="0"/>
+                      </a:rPr>
+                      <m:t>−1</m:t>
+                    </m:r>
+                  </m:oMath>
+                </a14:m>
+                <a:endParaRPr lang="en-US" dirty="0"/>
+              </a:p>
+              <a:p>
+                <a:pPr lvl="1"/>
+                <a14:m>
+                  <m:oMath xmlns:m="http://schemas.openxmlformats.org/officeDocument/2006/math">
+                    <m:sSup>
+                      <m:sSupPr>
+                        <m:ctrlPr>
+                          <a:rPr lang="en-CA" b="0" i="1" smtClean="0">
+                            <a:latin typeface="Cambria Math" panose="02040503050406030204" pitchFamily="18" charset="0"/>
+                          </a:rPr>
+                        </m:ctrlPr>
+                      </m:sSupPr>
+                      <m:e>
+                        <m:r>
+                          <a:rPr lang="en-CA" b="0" i="1" smtClean="0">
+                            <a:latin typeface="Cambria Math" panose="02040503050406030204" pitchFamily="18" charset="0"/>
+                          </a:rPr>
+                          <m:t>2</m:t>
+                        </m:r>
+                      </m:e>
+                      <m:sup>
+                        <m:r>
+                          <a:rPr lang="en-CA" b="0" i="1" smtClean="0">
+                            <a:latin typeface="Cambria Math" panose="02040503050406030204" pitchFamily="18" charset="0"/>
+                          </a:rPr>
+                          <m:t>h</m:t>
+                        </m:r>
+                      </m:sup>
+                    </m:sSup>
+                    <m:r>
+                      <a:rPr lang="en-CA" b="0" i="1" smtClean="0">
+                        <a:latin typeface="Cambria Math" panose="02040503050406030204" pitchFamily="18" charset="0"/>
+                      </a:rPr>
+                      <m:t>≤</m:t>
+                    </m:r>
+                    <m:r>
+                      <a:rPr lang="en-CA" b="0" i="1" smtClean="0">
+                        <a:latin typeface="Cambria Math" panose="02040503050406030204" pitchFamily="18" charset="0"/>
+                      </a:rPr>
+                      <m:t>𝑛</m:t>
+                    </m:r>
+                    <m:r>
+                      <a:rPr lang="en-CA" b="0" i="1" smtClean="0">
+                        <a:latin typeface="Cambria Math" panose="02040503050406030204" pitchFamily="18" charset="0"/>
+                      </a:rPr>
+                      <m:t>≤</m:t>
+                    </m:r>
+                    <m:sSup>
+                      <m:sSupPr>
+                        <m:ctrlPr>
+                          <a:rPr lang="en-US" b="0" i="1" smtClean="0">
+                            <a:latin typeface="Cambria Math" panose="02040503050406030204" pitchFamily="18" charset="0"/>
+                          </a:rPr>
+                        </m:ctrlPr>
+                      </m:sSupPr>
+                      <m:e>
+                        <m:r>
+                          <a:rPr lang="en-CA" b="0" i="1" smtClean="0">
+                            <a:latin typeface="Cambria Math" panose="02040503050406030204" pitchFamily="18" charset="0"/>
+                          </a:rPr>
+                          <m:t>2</m:t>
+                        </m:r>
+                      </m:e>
+                      <m:sup>
+                        <m:r>
+                          <a:rPr lang="en-CA" b="0" i="1" smtClean="0">
+                            <a:latin typeface="Cambria Math" panose="02040503050406030204" pitchFamily="18" charset="0"/>
+                          </a:rPr>
+                          <m:t>h</m:t>
+                        </m:r>
+                        <m:r>
+                          <a:rPr lang="en-CA" b="0" i="1" smtClean="0">
+                            <a:latin typeface="Cambria Math" panose="02040503050406030204" pitchFamily="18" charset="0"/>
+                          </a:rPr>
+                          <m:t>+1</m:t>
+                        </m:r>
+                      </m:sup>
+                    </m:sSup>
+                    <m:r>
+                      <a:rPr lang="en-CA" b="0" i="1" smtClean="0">
+                        <a:latin typeface="Cambria Math" panose="02040503050406030204" pitchFamily="18" charset="0"/>
+                      </a:rPr>
+                      <m:t>−1</m:t>
+                    </m:r>
+                    <m:r>
+                      <a:rPr lang="en-CA" b="0" i="0" smtClean="0">
+                        <a:latin typeface="Cambria Math" panose="02040503050406030204" pitchFamily="18" charset="0"/>
+                      </a:rPr>
+                      <m:t>&lt;</m:t>
+                    </m:r>
+                    <m:sSup>
+                      <m:sSupPr>
+                        <m:ctrlPr>
+                          <a:rPr lang="en-US" b="0" i="1" smtClean="0">
+                            <a:latin typeface="Cambria Math" panose="02040503050406030204" pitchFamily="18" charset="0"/>
+                          </a:rPr>
+                        </m:ctrlPr>
+                      </m:sSupPr>
+                      <m:e>
+                        <m:r>
+                          <a:rPr lang="en-CA" b="0" i="1" smtClean="0">
+                            <a:latin typeface="Cambria Math" panose="02040503050406030204" pitchFamily="18" charset="0"/>
+                          </a:rPr>
+                          <m:t>2</m:t>
+                        </m:r>
+                      </m:e>
+                      <m:sup>
+                        <m:r>
+                          <a:rPr lang="en-CA" b="0" i="1" smtClean="0">
+                            <a:latin typeface="Cambria Math" panose="02040503050406030204" pitchFamily="18" charset="0"/>
+                          </a:rPr>
+                          <m:t>h</m:t>
+                        </m:r>
+                        <m:r>
+                          <a:rPr lang="en-CA" b="0" i="1" smtClean="0">
+                            <a:latin typeface="Cambria Math" panose="02040503050406030204" pitchFamily="18" charset="0"/>
+                          </a:rPr>
+                          <m:t>+1</m:t>
+                        </m:r>
+                      </m:sup>
+                    </m:sSup>
+                  </m:oMath>
+                </a14:m>
+                <a:endParaRPr lang="en-CA" b="0" dirty="0"/>
+              </a:p>
+              <a:p>
+                <a:pPr lvl="1"/>
+                <a14:m>
+                  <m:oMath xmlns:m="http://schemas.openxmlformats.org/officeDocument/2006/math">
+                    <m:sSup>
+                      <m:sSupPr>
+                        <m:ctrlPr>
+                          <a:rPr lang="en-CA" b="0" i="1" smtClean="0">
+                            <a:latin typeface="Cambria Math" panose="02040503050406030204" pitchFamily="18" charset="0"/>
+                          </a:rPr>
+                        </m:ctrlPr>
+                      </m:sSupPr>
+                      <m:e>
+                        <m:r>
+                          <a:rPr lang="en-CA" b="0" i="1" smtClean="0">
+                            <a:latin typeface="Cambria Math" panose="02040503050406030204" pitchFamily="18" charset="0"/>
+                          </a:rPr>
+                          <m:t>2</m:t>
+                        </m:r>
+                      </m:e>
+                      <m:sup>
+                        <m:r>
+                          <a:rPr lang="en-CA" b="0" i="1" smtClean="0">
+                            <a:latin typeface="Cambria Math" panose="02040503050406030204" pitchFamily="18" charset="0"/>
+                          </a:rPr>
+                          <m:t>h</m:t>
+                        </m:r>
+                      </m:sup>
+                    </m:sSup>
+                    <m:r>
+                      <a:rPr lang="en-CA" b="0" i="1" smtClean="0">
+                        <a:latin typeface="Cambria Math" panose="02040503050406030204" pitchFamily="18" charset="0"/>
+                      </a:rPr>
+                      <m:t>≤</m:t>
+                    </m:r>
+                    <m:r>
+                      <a:rPr lang="en-CA" b="0" i="1" smtClean="0">
+                        <a:latin typeface="Cambria Math" panose="02040503050406030204" pitchFamily="18" charset="0"/>
+                      </a:rPr>
+                      <m:t>𝑛</m:t>
+                    </m:r>
+                    <m:r>
+                      <a:rPr lang="en-CA" b="0" i="1" smtClean="0">
+                        <a:latin typeface="Cambria Math" panose="02040503050406030204" pitchFamily="18" charset="0"/>
+                      </a:rPr>
+                      <m:t>&lt;</m:t>
+                    </m:r>
+                    <m:sSup>
+                      <m:sSupPr>
+                        <m:ctrlPr>
+                          <a:rPr lang="en-US" b="0" i="1" smtClean="0">
+                            <a:latin typeface="Cambria Math" panose="02040503050406030204" pitchFamily="18" charset="0"/>
+                          </a:rPr>
+                        </m:ctrlPr>
+                      </m:sSupPr>
+                      <m:e>
+                        <m:r>
+                          <a:rPr lang="en-CA" b="0" i="1" smtClean="0">
+                            <a:latin typeface="Cambria Math" panose="02040503050406030204" pitchFamily="18" charset="0"/>
+                          </a:rPr>
+                          <m:t>2</m:t>
+                        </m:r>
+                      </m:e>
+                      <m:sup>
+                        <m:r>
+                          <a:rPr lang="en-CA" b="0" i="1" smtClean="0">
+                            <a:latin typeface="Cambria Math" panose="02040503050406030204" pitchFamily="18" charset="0"/>
+                          </a:rPr>
+                          <m:t>h</m:t>
+                        </m:r>
+                        <m:r>
+                          <a:rPr lang="en-CA" b="0" i="1" smtClean="0">
+                            <a:latin typeface="Cambria Math" panose="02040503050406030204" pitchFamily="18" charset="0"/>
+                          </a:rPr>
+                          <m:t>+1</m:t>
+                        </m:r>
+                      </m:sup>
+                    </m:sSup>
+                  </m:oMath>
+                </a14:m>
+                <a:endParaRPr lang="en-CA" b="0" dirty="0"/>
+              </a:p>
+              <a:p>
+                <a:r>
+                  <a:rPr lang="en-US" dirty="0"/>
+                  <a:t>Take log base 2 of all terms of the inequality to get:</a:t>
+                </a:r>
+              </a:p>
+              <a:p>
+                <a:pPr lvl="1"/>
+                <a14:m>
+                  <m:oMath xmlns:m="http://schemas.openxmlformats.org/officeDocument/2006/math">
+                    <m:r>
+                      <a:rPr lang="en-CA" b="0" i="1" smtClean="0">
+                        <a:latin typeface="Cambria Math" panose="02040503050406030204" pitchFamily="18" charset="0"/>
+                      </a:rPr>
+                      <m:t>h</m:t>
+                    </m:r>
+                    <m:r>
+                      <a:rPr lang="en-CA" b="0" i="1" smtClean="0">
+                        <a:latin typeface="Cambria Math" panose="02040503050406030204" pitchFamily="18" charset="0"/>
+                      </a:rPr>
+                      <m:t>≤</m:t>
+                    </m:r>
+                    <m:func>
+                      <m:funcPr>
+                        <m:ctrlPr>
+                          <a:rPr lang="en-US" b="0" i="1" smtClean="0">
+                            <a:latin typeface="Cambria Math" panose="02040503050406030204" pitchFamily="18" charset="0"/>
+                          </a:rPr>
+                        </m:ctrlPr>
+                      </m:funcPr>
+                      <m:fName>
+                        <m:r>
+                          <m:rPr>
+                            <m:sty m:val="p"/>
+                          </m:rPr>
+                          <a:rPr lang="en-US" b="0" i="0" smtClean="0">
+                            <a:latin typeface="Cambria Math" panose="02040503050406030204" pitchFamily="18" charset="0"/>
+                          </a:rPr>
+                          <m:t>log</m:t>
+                        </m:r>
+                      </m:fName>
+                      <m:e>
+                        <m:r>
+                          <a:rPr lang="en-CA" b="0" i="1" smtClean="0">
+                            <a:latin typeface="Cambria Math" panose="02040503050406030204" pitchFamily="18" charset="0"/>
+                          </a:rPr>
+                          <m:t>𝑛</m:t>
+                        </m:r>
+                        <m:r>
+                          <a:rPr lang="en-CA" b="0" i="1" smtClean="0">
+                            <a:latin typeface="Cambria Math" panose="02040503050406030204" pitchFamily="18" charset="0"/>
+                          </a:rPr>
+                          <m:t>&lt;</m:t>
+                        </m:r>
+                        <m:r>
+                          <a:rPr lang="en-CA" b="0" i="1" smtClean="0">
+                            <a:latin typeface="Cambria Math" panose="02040503050406030204" pitchFamily="18" charset="0"/>
+                          </a:rPr>
+                          <m:t>h</m:t>
+                        </m:r>
+                        <m:r>
+                          <a:rPr lang="en-CA" b="0" i="1" smtClean="0">
+                            <a:latin typeface="Cambria Math" panose="02040503050406030204" pitchFamily="18" charset="0"/>
+                          </a:rPr>
+                          <m:t>+1</m:t>
+                        </m:r>
+                      </m:e>
+                    </m:func>
+                  </m:oMath>
+                </a14:m>
+                <a:endParaRPr lang="en-US" dirty="0"/>
+              </a:p>
+              <a:p>
+                <a:pPr lvl="1"/>
+                <a:r>
+                  <a:rPr lang="en-US" dirty="0"/>
+                  <a:t>Therefore: </a:t>
+                </a:r>
+                <a14:m>
+                  <m:oMath xmlns:m="http://schemas.openxmlformats.org/officeDocument/2006/math">
+                    <m:r>
+                      <a:rPr lang="en-CA" b="0" i="1" smtClean="0">
+                        <a:latin typeface="Cambria Math" panose="02040503050406030204" pitchFamily="18" charset="0"/>
+                      </a:rPr>
+                      <m:t>h</m:t>
+                    </m:r>
+                    <m:r>
+                      <a:rPr lang="en-CA" b="0" i="1" smtClean="0">
+                        <a:latin typeface="Cambria Math" panose="02040503050406030204" pitchFamily="18" charset="0"/>
+                      </a:rPr>
+                      <m:t>=</m:t>
+                    </m:r>
+                    <m:d>
+                      <m:dPr>
+                        <m:begChr m:val="⌊"/>
+                        <m:endChr m:val="⌋"/>
+                        <m:ctrlPr>
+                          <a:rPr lang="en-US" b="0" i="1" smtClean="0">
+                            <a:latin typeface="Cambria Math" panose="02040503050406030204" pitchFamily="18" charset="0"/>
+                          </a:rPr>
+                        </m:ctrlPr>
+                      </m:dPr>
+                      <m:e>
+                        <m:func>
+                          <m:funcPr>
+                            <m:ctrlPr>
+                              <a:rPr lang="en-US" b="0" i="1" smtClean="0">
+                                <a:latin typeface="Cambria Math" panose="02040503050406030204" pitchFamily="18" charset="0"/>
+                              </a:rPr>
+                            </m:ctrlPr>
+                          </m:funcPr>
+                          <m:fName>
+                            <m:sSub>
+                              <m:sSubPr>
+                                <m:ctrlPr>
+                                  <a:rPr lang="en-US" b="0" i="1" smtClean="0">
+                                    <a:latin typeface="Cambria Math" panose="02040503050406030204" pitchFamily="18" charset="0"/>
+                                  </a:rPr>
+                                </m:ctrlPr>
+                              </m:sSubPr>
+                              <m:e>
+                                <m:r>
+                                  <m:rPr>
+                                    <m:sty m:val="p"/>
+                                  </m:rPr>
+                                  <a:rPr lang="en-US" b="0" i="0" smtClean="0">
+                                    <a:latin typeface="Cambria Math" panose="02040503050406030204" pitchFamily="18" charset="0"/>
+                                  </a:rPr>
+                                  <m:t>log</m:t>
+                                </m:r>
+                              </m:e>
+                              <m:sub>
+                                <m:r>
+                                  <a:rPr lang="en-CA" b="0" i="1" smtClean="0">
+                                    <a:latin typeface="Cambria Math" panose="02040503050406030204" pitchFamily="18" charset="0"/>
+                                  </a:rPr>
+                                  <m:t>2</m:t>
+                                </m:r>
+                              </m:sub>
+                            </m:sSub>
+                          </m:fName>
+                          <m:e>
+                            <m:r>
+                              <a:rPr lang="en-CA" b="0" i="1" smtClean="0">
+                                <a:latin typeface="Cambria Math" panose="02040503050406030204" pitchFamily="18" charset="0"/>
+                              </a:rPr>
+                              <m:t>𝑛</m:t>
+                            </m:r>
+                          </m:e>
+                        </m:func>
+                      </m:e>
+                    </m:d>
+                  </m:oMath>
+                </a14:m>
+                <a:endParaRPr lang="en-US" dirty="0"/>
+              </a:p>
+            </p:txBody>
+          </p:sp>
+        </mc:Choice>
+        <mc:Fallback>
+          <p:sp>
+            <p:nvSpPr>
+              <p:cNvPr id="3" name="Content Placeholder 2">
+                <a:extLst>
+                  <a:ext uri="{FF2B5EF4-FFF2-40B4-BE49-F238E27FC236}">
+                    <a16:creationId xmlns:a16="http://schemas.microsoft.com/office/drawing/2014/main" id="{B8C0F48B-B380-4251-F7BA-F921B6C0BB5E}"/>
+                  </a:ext>
+                </a:extLst>
+              </p:cNvPr>
+              <p:cNvSpPr>
+                <a:spLocks noGrp="1" noRot="1" noChangeAspect="1" noMove="1" noResize="1" noEditPoints="1" noAdjustHandles="1" noChangeArrowheads="1" noChangeShapeType="1" noTextEdit="1"/>
+              </p:cNvSpPr>
+              <p:nvPr>
+                <p:ph idx="1"/>
+              </p:nvPr>
+            </p:nvSpPr>
+            <p:spPr>
+              <a:blipFill>
+                <a:blip r:embed="rId3"/>
+                <a:stretch>
+                  <a:fillRect l="-965" t="-2616"/>
+                </a:stretch>
+              </a:blipFill>
+            </p:spPr>
+            <p:txBody>
+              <a:bodyPr/>
+              <a:lstStyle/>
+              <a:p>
+                <a:r>
+                  <a:rPr lang="en-US">
+                    <a:noFill/>
+                  </a:rPr>
+                  <a:t> </a:t>
+                </a:r>
+              </a:p>
+            </p:txBody>
+          </p:sp>
+        </mc:Fallback>
+      </mc:AlternateContent>
+      <mc:AlternateContent xmlns:mc="http://schemas.openxmlformats.org/markup-compatibility/2006">
+        <mc:Choice xmlns:a14="http://schemas.microsoft.com/office/drawing/2010/main" Requires="a14">
+          <p:sp>
+            <p:nvSpPr>
+              <p:cNvPr id="4" name="TextBox 3">
+                <a:extLst>
+                  <a:ext uri="{FF2B5EF4-FFF2-40B4-BE49-F238E27FC236}">
+                    <a16:creationId xmlns:a16="http://schemas.microsoft.com/office/drawing/2014/main" id="{6291824A-8A1B-1E60-E3EE-6E03EA2819D3}"/>
+                  </a:ext>
+                </a:extLst>
+              </p:cNvPr>
+              <p:cNvSpPr txBox="1"/>
+              <p:nvPr/>
+            </p:nvSpPr>
+            <p:spPr>
+              <a:xfrm>
+                <a:off x="5034225" y="3214138"/>
+                <a:ext cx="2331218" cy="923330"/>
+              </a:xfrm>
+              <a:prstGeom prst="rect">
+                <a:avLst/>
+              </a:prstGeom>
+              <a:solidFill>
+                <a:schemeClr val="accent2">
+                  <a:lumMod val="40000"/>
+                  <a:lumOff val="60000"/>
+                </a:schemeClr>
+              </a:solidFill>
+            </p:spPr>
+            <p:txBody>
+              <a:bodyPr wrap="square" rtlCol="0">
+                <a:spAutoFit/>
+              </a:bodyPr>
+              <a:lstStyle/>
+              <a:p>
+                <a:pPr algn="ctr"/>
+                <a14:m>
+                  <m:oMath xmlns:m="http://schemas.openxmlformats.org/officeDocument/2006/math">
+                    <m:r>
+                      <a:rPr lang="en-US" i="1" dirty="0" smtClean="0">
+                        <a:latin typeface="Cambria Math" panose="02040503050406030204" pitchFamily="18" charset="0"/>
+                      </a:rPr>
+                      <m:t>𝑛</m:t>
+                    </m:r>
+                  </m:oMath>
+                </a14:m>
+                <a:r>
+                  <a:rPr lang="en-US" dirty="0"/>
+                  <a:t> is the number of nodes in a complete binary tree of height </a:t>
+                </a:r>
+                <a14:m>
+                  <m:oMath xmlns:m="http://schemas.openxmlformats.org/officeDocument/2006/math">
+                    <m:r>
+                      <a:rPr lang="en-US" i="1" dirty="0" smtClean="0">
+                        <a:latin typeface="Cambria Math" panose="02040503050406030204" pitchFamily="18" charset="0"/>
+                      </a:rPr>
+                      <m:t>h</m:t>
+                    </m:r>
+                  </m:oMath>
+                </a14:m>
+                <a:endParaRPr lang="en-US" dirty="0"/>
+              </a:p>
+            </p:txBody>
+          </p:sp>
+        </mc:Choice>
+        <mc:Fallback>
+          <p:sp>
+            <p:nvSpPr>
+              <p:cNvPr id="4" name="TextBox 3">
+                <a:extLst>
+                  <a:ext uri="{FF2B5EF4-FFF2-40B4-BE49-F238E27FC236}">
+                    <a16:creationId xmlns:a16="http://schemas.microsoft.com/office/drawing/2014/main" id="{6291824A-8A1B-1E60-E3EE-6E03EA2819D3}"/>
+                  </a:ext>
+                </a:extLst>
+              </p:cNvPr>
+              <p:cNvSpPr txBox="1">
+                <a:spLocks noRot="1" noChangeAspect="1" noMove="1" noResize="1" noEditPoints="1" noAdjustHandles="1" noChangeArrowheads="1" noChangeShapeType="1" noTextEdit="1"/>
+              </p:cNvSpPr>
+              <p:nvPr/>
+            </p:nvSpPr>
+            <p:spPr>
+              <a:xfrm>
+                <a:off x="5034225" y="3214138"/>
+                <a:ext cx="2331218" cy="923330"/>
+              </a:xfrm>
+              <a:prstGeom prst="rect">
+                <a:avLst/>
+              </a:prstGeom>
+              <a:blipFill>
+                <a:blip r:embed="rId4"/>
+                <a:stretch>
+                  <a:fillRect l="-1630" t="-1351" r="-1087" b="-10811"/>
+                </a:stretch>
+              </a:blipFill>
+            </p:spPr>
+            <p:txBody>
+              <a:bodyPr/>
+              <a:lstStyle/>
+              <a:p>
+                <a:r>
+                  <a:rPr lang="en-US">
+                    <a:noFill/>
+                  </a:rPr>
+                  <a:t> </a:t>
+                </a:r>
+              </a:p>
+            </p:txBody>
+          </p:sp>
+        </mc:Fallback>
+      </mc:AlternateContent>
+      <p:sp>
+        <p:nvSpPr>
+          <p:cNvPr id="5" name="Freeform 4">
+            <a:extLst>
+              <a:ext uri="{FF2B5EF4-FFF2-40B4-BE49-F238E27FC236}">
+                <a16:creationId xmlns:a16="http://schemas.microsoft.com/office/drawing/2014/main" id="{17E68C73-5AB0-5278-E90B-0B41FBD4AECD}"/>
+              </a:ext>
+            </a:extLst>
+          </p:cNvPr>
+          <p:cNvSpPr/>
+          <p:nvPr/>
+        </p:nvSpPr>
+        <p:spPr>
+          <a:xfrm>
+            <a:off x="2461847" y="3214138"/>
+            <a:ext cx="2572378" cy="615849"/>
+          </a:xfrm>
+          <a:custGeom>
+            <a:avLst/>
+            <a:gdLst>
+              <a:gd name="csX0" fmla="*/ 2572378 w 2572378"/>
+              <a:gd name="csY0" fmla="*/ 123480 h 615849"/>
+              <a:gd name="csX1" fmla="*/ 1115367 w 2572378"/>
+              <a:gd name="csY1" fmla="*/ 33045 h 615849"/>
+              <a:gd name="csX2" fmla="*/ 0 w 2572378"/>
+              <a:gd name="csY2" fmla="*/ 615849 h 615849"/>
+            </a:gdLst>
+            <a:ahLst/>
+            <a:cxnLst>
+              <a:cxn ang="0">
+                <a:pos x="csX0" y="csY0"/>
+              </a:cxn>
+              <a:cxn ang="0">
+                <a:pos x="csX1" y="csY1"/>
+              </a:cxn>
+              <a:cxn ang="0">
+                <a:pos x="csX2" y="csY2"/>
+              </a:cxn>
+            </a:cxnLst>
+            <a:rect l="l" t="t" r="r" b="b"/>
+            <a:pathLst>
+              <a:path w="2572378" h="615849">
+                <a:moveTo>
+                  <a:pt x="2572378" y="123480"/>
+                </a:moveTo>
+                <a:cubicBezTo>
+                  <a:pt x="2058237" y="37232"/>
+                  <a:pt x="1544097" y="-49016"/>
+                  <a:pt x="1115367" y="33045"/>
+                </a:cubicBezTo>
+                <a:cubicBezTo>
+                  <a:pt x="686637" y="115106"/>
+                  <a:pt x="343318" y="365477"/>
+                  <a:pt x="0" y="615849"/>
+                </a:cubicBezTo>
+              </a:path>
+            </a:pathLst>
+          </a:custGeom>
+          <a:ln>
+            <a:headEnd type="none" w="med" len="med"/>
+            <a:tailEnd type="triangle" w="med" len="med"/>
+          </a:ln>
+        </p:spPr>
+        <p:style>
+          <a:lnRef idx="1">
+            <a:schemeClr val="accent4"/>
+          </a:lnRef>
+          <a:fillRef idx="0">
+            <a:schemeClr val="accent4"/>
+          </a:fillRef>
+          <a:effectRef idx="0">
+            <a:schemeClr val="accent4"/>
+          </a:effectRef>
+          <a:fontRef idx="minor">
+            <a:schemeClr val="tx1"/>
+          </a:fontRef>
+        </p:style>
+        <p:txBody>
+          <a:bodyPr rtlCol="0" anchor="ctr"/>
+          <a:lstStyle/>
+          <a:p>
+            <a:pPr algn="ctr"/>
+            <a:endParaRPr lang="en-US" dirty="0"/>
+          </a:p>
+        </p:txBody>
+      </p:sp>
+      <mc:AlternateContent xmlns:mc="http://schemas.openxmlformats.org/markup-compatibility/2006">
+        <mc:Choice xmlns:a14="http://schemas.microsoft.com/office/drawing/2010/main" Requires="a14">
+          <p:sp>
+            <p:nvSpPr>
+              <p:cNvPr id="6" name="TextBox 5">
+                <a:extLst>
+                  <a:ext uri="{FF2B5EF4-FFF2-40B4-BE49-F238E27FC236}">
+                    <a16:creationId xmlns:a16="http://schemas.microsoft.com/office/drawing/2014/main" id="{3AF191AF-5649-3F68-B501-31D02B1B4660}"/>
+                  </a:ext>
+                </a:extLst>
+              </p:cNvPr>
+              <p:cNvSpPr txBox="1"/>
+              <p:nvPr/>
+            </p:nvSpPr>
+            <p:spPr>
+              <a:xfrm>
+                <a:off x="5034224" y="5525981"/>
+                <a:ext cx="2572377" cy="923330"/>
+              </a:xfrm>
+              <a:prstGeom prst="rect">
+                <a:avLst/>
+              </a:prstGeom>
+              <a:solidFill>
+                <a:schemeClr val="accent2">
+                  <a:lumMod val="40000"/>
+                  <a:lumOff val="60000"/>
+                </a:schemeClr>
+              </a:solidFill>
+            </p:spPr>
+            <p:txBody>
+              <a:bodyPr wrap="square" rtlCol="0">
+                <a:spAutoFit/>
+              </a:bodyPr>
+              <a:lstStyle/>
+              <a:p>
+                <a:pPr algn="ctr"/>
+                <a:r>
+                  <a:rPr lang="en-US" dirty="0"/>
+                  <a:t>Recall that </a:t>
+                </a:r>
+                <a14:m>
+                  <m:oMath xmlns:m="http://schemas.openxmlformats.org/officeDocument/2006/math">
+                    <m:d>
+                      <m:dPr>
+                        <m:begChr m:val="⌊"/>
+                        <m:endChr m:val="⌋"/>
+                        <m:ctrlPr>
+                          <a:rPr lang="en-US" i="1" smtClean="0">
+                            <a:latin typeface="Cambria Math" panose="02040503050406030204" pitchFamily="18" charset="0"/>
+                          </a:rPr>
+                        </m:ctrlPr>
+                      </m:dPr>
+                      <m:e>
+                        <m:r>
+                          <a:rPr lang="en-CA" b="0" i="1" smtClean="0">
+                            <a:latin typeface="Cambria Math" panose="02040503050406030204" pitchFamily="18" charset="0"/>
+                          </a:rPr>
+                          <m:t>𝑥</m:t>
+                        </m:r>
+                      </m:e>
+                    </m:d>
+                  </m:oMath>
+                </a14:m>
+                <a:r>
+                  <a:rPr lang="en-US" dirty="0"/>
+                  <a:t> means </a:t>
+                </a:r>
+                <a:r>
+                  <a:rPr lang="en-US" b="1" dirty="0"/>
+                  <a:t>floor</a:t>
+                </a:r>
+                <a:r>
+                  <a:rPr lang="en-US" dirty="0"/>
+                  <a:t>, i.e. chop of any digits after the decimal.</a:t>
+                </a:r>
+              </a:p>
+            </p:txBody>
+          </p:sp>
+        </mc:Choice>
+        <mc:Fallback>
+          <p:sp>
+            <p:nvSpPr>
+              <p:cNvPr id="6" name="TextBox 5">
+                <a:extLst>
+                  <a:ext uri="{FF2B5EF4-FFF2-40B4-BE49-F238E27FC236}">
+                    <a16:creationId xmlns:a16="http://schemas.microsoft.com/office/drawing/2014/main" id="{3AF191AF-5649-3F68-B501-31D02B1B4660}"/>
+                  </a:ext>
+                </a:extLst>
+              </p:cNvPr>
+              <p:cNvSpPr txBox="1">
+                <a:spLocks noRot="1" noChangeAspect="1" noMove="1" noResize="1" noEditPoints="1" noAdjustHandles="1" noChangeArrowheads="1" noChangeShapeType="1" noTextEdit="1"/>
+              </p:cNvSpPr>
+              <p:nvPr/>
+            </p:nvSpPr>
+            <p:spPr>
+              <a:xfrm>
+                <a:off x="5034224" y="5525981"/>
+                <a:ext cx="2572377" cy="923330"/>
+              </a:xfrm>
+              <a:prstGeom prst="rect">
+                <a:avLst/>
+              </a:prstGeom>
+              <a:blipFill>
+                <a:blip r:embed="rId5"/>
+                <a:stretch>
+                  <a:fillRect l="-490" t="-2703" b="-10811"/>
+                </a:stretch>
+              </a:blipFill>
+            </p:spPr>
+            <p:txBody>
+              <a:bodyPr/>
+              <a:lstStyle/>
+              <a:p>
+                <a:r>
+                  <a:rPr lang="en-US">
+                    <a:noFill/>
+                  </a:rPr>
+                  <a:t> </a:t>
+                </a:r>
+              </a:p>
+            </p:txBody>
+          </p:sp>
+        </mc:Fallback>
+      </mc:AlternateContent>
+    </p:spTree>
+    <p:extLst>
+      <p:ext uri="{BB962C8B-B14F-4D97-AF65-F5344CB8AC3E}">
+        <p14:creationId xmlns:p14="http://schemas.microsoft.com/office/powerpoint/2010/main" val="111845022"/>
+      </p:ext>
+    </p:extLst>
+  </p:cSld>
+  <p:clrMapOvr>
+    <a:masterClrMapping/>
+  </p:clrMapOvr>
+</p:sld>
+</file>
+
+<file path=ppt/slides/slide30.xml><?xml version="1.0" encoding="utf-8"?>
 <p:sld xmlns:a="http://schemas.openxmlformats.org/drawingml/2006/main" xmlns:r="http://schemas.openxmlformats.org/officeDocument/2006/relationships" xmlns:p="http://schemas.openxmlformats.org/presentationml/2006/main">
   <p:cSld>
     <p:spTree>
@@ -14803,7 +17216,7 @@
 </p:sld>
 </file>
 
-<file path=ppt/slides/slide29.xml><?xml version="1.0" encoding="utf-8"?>
+<file path=ppt/slides/slide31.xml><?xml version="1.0" encoding="utf-8"?>
 <p:sld xmlns:a="http://schemas.openxmlformats.org/drawingml/2006/main" xmlns:r="http://schemas.openxmlformats.org/officeDocument/2006/relationships" xmlns:p="http://schemas.openxmlformats.org/presentationml/2006/main">
   <p:cSld>
     <p:spTree>
@@ -14939,1173 +17352,6 @@
     <p:extLst>
       <p:ext uri="{BB962C8B-B14F-4D97-AF65-F5344CB8AC3E}">
         <p14:creationId xmlns:p14="http://schemas.microsoft.com/office/powerpoint/2010/main" val="659387094"/>
-      </p:ext>
-    </p:extLst>
-  </p:cSld>
-  <p:clrMapOvr>
-    <a:masterClrMapping/>
-  </p:clrMapOvr>
-</p:sld>
-</file>
-
-<file path=ppt/slides/slide3.xml><?xml version="1.0" encoding="utf-8"?>
-<p:sld xmlns:a="http://schemas.openxmlformats.org/drawingml/2006/main" xmlns:r="http://schemas.openxmlformats.org/officeDocument/2006/relationships" xmlns:p="http://schemas.openxmlformats.org/presentationml/2006/main">
-  <p:cSld>
-    <p:spTree>
-      <p:nvGrpSpPr>
-        <p:cNvPr id="1" name=""/>
-        <p:cNvGrpSpPr/>
-        <p:nvPr/>
-      </p:nvGrpSpPr>
-      <p:grpSpPr>
-        <a:xfrm>
-          <a:off x="0" y="0"/>
-          <a:ext cx="0" cy="0"/>
-          <a:chOff x="0" y="0"/>
-          <a:chExt cx="0" cy="0"/>
-        </a:xfrm>
-      </p:grpSpPr>
-      <mc:AlternateContent xmlns:mc="http://schemas.openxmlformats.org/markup-compatibility/2006">
-        <mc:Choice xmlns:a14="http://schemas.microsoft.com/office/drawing/2010/main" Requires="a14">
-          <p:sp>
-            <p:nvSpPr>
-              <p:cNvPr id="2" name="Title 1">
-                <a:extLst>
-                  <a:ext uri="{FF2B5EF4-FFF2-40B4-BE49-F238E27FC236}">
-                    <a16:creationId xmlns:a16="http://schemas.microsoft.com/office/drawing/2014/main" id="{262E61BC-3BAE-3BB0-49D9-78488839A353}"/>
-                  </a:ext>
-                </a:extLst>
-              </p:cNvPr>
-              <p:cNvSpPr>
-                <a:spLocks noGrp="1"/>
-              </p:cNvSpPr>
-              <p:nvPr>
-                <p:ph type="title"/>
-              </p:nvPr>
-            </p:nvSpPr>
-            <p:spPr/>
-            <p:txBody>
-              <a:bodyPr/>
-              <a:lstStyle/>
-              <a:p>
-                <a:r>
-                  <a:rPr lang="en-US" dirty="0"/>
-                  <a:t>Why Are Heaps height </a:t>
-                </a:r>
-                <a14:m>
-                  <m:oMath xmlns:m="http://schemas.openxmlformats.org/officeDocument/2006/math">
-                    <m:func>
-                      <m:funcPr>
-                        <m:ctrlPr>
-                          <a:rPr lang="en-US" i="1" smtClean="0">
-                            <a:latin typeface="Cambria Math" panose="02040503050406030204" pitchFamily="18" charset="0"/>
-                          </a:rPr>
-                        </m:ctrlPr>
-                      </m:funcPr>
-                      <m:fName>
-                        <m:r>
-                          <m:rPr>
-                            <m:sty m:val="p"/>
-                          </m:rPr>
-                          <a:rPr lang="en-US" i="0" smtClean="0">
-                            <a:latin typeface="Cambria Math" panose="02040503050406030204" pitchFamily="18" charset="0"/>
-                          </a:rPr>
-                          <m:t>log</m:t>
-                        </m:r>
-                      </m:fName>
-                      <m:e>
-                        <m:r>
-                          <a:rPr lang="en-CA" b="0" i="1" smtClean="0">
-                            <a:latin typeface="Cambria Math" panose="02040503050406030204" pitchFamily="18" charset="0"/>
-                          </a:rPr>
-                          <m:t>𝑛</m:t>
-                        </m:r>
-                      </m:e>
-                    </m:func>
-                  </m:oMath>
-                </a14:m>
-                <a:r>
-                  <a:rPr lang="en-US" dirty="0"/>
-                  <a:t>? </a:t>
-                </a:r>
-              </a:p>
-            </p:txBody>
-          </p:sp>
-        </mc:Choice>
-        <mc:Fallback>
-          <p:sp>
-            <p:nvSpPr>
-              <p:cNvPr id="2" name="Title 1">
-                <a:extLst>
-                  <a:ext uri="{FF2B5EF4-FFF2-40B4-BE49-F238E27FC236}">
-                    <a16:creationId xmlns:a16="http://schemas.microsoft.com/office/drawing/2014/main" id="{262E61BC-3BAE-3BB0-49D9-78488839A353}"/>
-                  </a:ext>
-                </a:extLst>
-              </p:cNvPr>
-              <p:cNvSpPr>
-                <a:spLocks noGrp="1" noRot="1" noChangeAspect="1" noMove="1" noResize="1" noEditPoints="1" noAdjustHandles="1" noChangeArrowheads="1" noChangeShapeType="1" noTextEdit="1"/>
-              </p:cNvSpPr>
-              <p:nvPr>
-                <p:ph type="title"/>
-              </p:nvPr>
-            </p:nvSpPr>
-            <p:spPr>
-              <a:blipFill>
-                <a:blip r:embed="rId2"/>
-                <a:stretch>
-                  <a:fillRect l="-2413"/>
-                </a:stretch>
-              </a:blipFill>
-            </p:spPr>
-            <p:txBody>
-              <a:bodyPr/>
-              <a:lstStyle/>
-              <a:p>
-                <a:r>
-                  <a:rPr lang="en-US">
-                    <a:noFill/>
-                  </a:rPr>
-                  <a:t> </a:t>
-                </a:r>
-              </a:p>
-            </p:txBody>
-          </p:sp>
-        </mc:Fallback>
-      </mc:AlternateContent>
-      <mc:AlternateContent xmlns:mc="http://schemas.openxmlformats.org/markup-compatibility/2006">
-        <mc:Choice xmlns:a14="http://schemas.microsoft.com/office/drawing/2010/main" Requires="a14">
-          <p:sp>
-            <p:nvSpPr>
-              <p:cNvPr id="3" name="Content Placeholder 2">
-                <a:extLst>
-                  <a:ext uri="{FF2B5EF4-FFF2-40B4-BE49-F238E27FC236}">
-                    <a16:creationId xmlns:a16="http://schemas.microsoft.com/office/drawing/2014/main" id="{B8C0F48B-B380-4251-F7BA-F921B6C0BB5E}"/>
-                  </a:ext>
-                </a:extLst>
-              </p:cNvPr>
-              <p:cNvSpPr>
-                <a:spLocks noGrp="1"/>
-              </p:cNvSpPr>
-              <p:nvPr>
-                <p:ph idx="1"/>
-              </p:nvPr>
-            </p:nvSpPr>
-            <p:spPr/>
-            <p:txBody>
-              <a:bodyPr>
-                <a:normAutofit fontScale="92500" lnSpcReduction="10000"/>
-              </a:bodyPr>
-              <a:lstStyle/>
-              <a:p>
-                <a:r>
-                  <a:rPr lang="en-US" dirty="0"/>
-                  <a:t>A </a:t>
-                </a:r>
-                <a:r>
-                  <a:rPr lang="en-US" b="1" dirty="0"/>
-                  <a:t>perfect binary tree </a:t>
-                </a:r>
-                <a:r>
-                  <a:rPr lang="en-US" dirty="0"/>
-                  <a:t>of height </a:t>
-                </a:r>
-                <a14:m>
-                  <m:oMath xmlns:m="http://schemas.openxmlformats.org/officeDocument/2006/math">
-                    <m:r>
-                      <a:rPr lang="en-US" i="1" dirty="0" smtClean="0">
-                        <a:latin typeface="Cambria Math" panose="02040503050406030204" pitchFamily="18" charset="0"/>
-                      </a:rPr>
-                      <m:t>h</m:t>
-                    </m:r>
-                  </m:oMath>
-                </a14:m>
-                <a:r>
-                  <a:rPr lang="en-US" dirty="0"/>
-                  <a:t> can has </a:t>
-                </a:r>
-                <a14:m>
-                  <m:oMath xmlns:m="http://schemas.openxmlformats.org/officeDocument/2006/math">
-                    <m:sSup>
-                      <m:sSupPr>
-                        <m:ctrlPr>
-                          <a:rPr lang="en-US" i="1" smtClean="0">
-                            <a:latin typeface="Cambria Math" panose="02040503050406030204" pitchFamily="18" charset="0"/>
-                          </a:rPr>
-                        </m:ctrlPr>
-                      </m:sSupPr>
-                      <m:e>
-                        <m:r>
-                          <a:rPr lang="en-CA" b="0" i="1" smtClean="0">
-                            <a:latin typeface="Cambria Math" panose="02040503050406030204" pitchFamily="18" charset="0"/>
-                          </a:rPr>
-                          <m:t>2</m:t>
-                        </m:r>
-                      </m:e>
-                      <m:sup>
-                        <m:r>
-                          <a:rPr lang="en-CA" b="0" i="1" smtClean="0">
-                            <a:latin typeface="Cambria Math" panose="02040503050406030204" pitchFamily="18" charset="0"/>
-                          </a:rPr>
-                          <m:t>h</m:t>
-                        </m:r>
-                        <m:r>
-                          <a:rPr lang="en-CA" b="0" i="1" smtClean="0">
-                            <a:latin typeface="Cambria Math" panose="02040503050406030204" pitchFamily="18" charset="0"/>
-                          </a:rPr>
-                          <m:t>+1</m:t>
-                        </m:r>
-                      </m:sup>
-                    </m:sSup>
-                    <m:r>
-                      <a:rPr lang="en-CA" b="0" i="1" smtClean="0">
-                        <a:latin typeface="Cambria Math" panose="02040503050406030204" pitchFamily="18" charset="0"/>
-                      </a:rPr>
-                      <m:t>−1</m:t>
-                    </m:r>
-                  </m:oMath>
-                </a14:m>
-                <a:r>
-                  <a:rPr lang="en-US" dirty="0"/>
-                  <a:t> nodes</a:t>
-                </a:r>
-              </a:p>
-              <a:p>
-                <a:pPr lvl="1"/>
-                <a:r>
-                  <a:rPr lang="en-US" dirty="0"/>
-                  <a:t>Check this by counting nodes in examples … the pattern should be clear</a:t>
-                </a:r>
-              </a:p>
-              <a:p>
-                <a:r>
-                  <a:rPr lang="en-US" dirty="0"/>
-                  <a:t>A </a:t>
-                </a:r>
-                <a:r>
-                  <a:rPr lang="en-US" b="1" dirty="0"/>
-                  <a:t>complete binary tree </a:t>
-                </a:r>
-                <a:r>
-                  <a:rPr lang="en-US" dirty="0"/>
-                  <a:t>of height </a:t>
-                </a:r>
-                <a14:m>
-                  <m:oMath xmlns:m="http://schemas.openxmlformats.org/officeDocument/2006/math">
-                    <m:r>
-                      <a:rPr lang="en-US" i="1" dirty="0" smtClean="0">
-                        <a:latin typeface="Cambria Math" panose="02040503050406030204" pitchFamily="18" charset="0"/>
-                      </a:rPr>
-                      <m:t>h</m:t>
-                    </m:r>
-                  </m:oMath>
-                </a14:m>
-                <a:r>
-                  <a:rPr lang="en-US" dirty="0"/>
-                  <a:t> has between </a:t>
-                </a:r>
-                <a14:m>
-                  <m:oMath xmlns:m="http://schemas.openxmlformats.org/officeDocument/2006/math">
-                    <m:sSup>
-                      <m:sSupPr>
-                        <m:ctrlPr>
-                          <a:rPr lang="en-US" i="1" smtClean="0">
-                            <a:latin typeface="Cambria Math" panose="02040503050406030204" pitchFamily="18" charset="0"/>
-                          </a:rPr>
-                        </m:ctrlPr>
-                      </m:sSupPr>
-                      <m:e>
-                        <m:r>
-                          <a:rPr lang="en-CA" b="0" i="1" smtClean="0">
-                            <a:latin typeface="Cambria Math" panose="02040503050406030204" pitchFamily="18" charset="0"/>
-                          </a:rPr>
-                          <m:t>2</m:t>
-                        </m:r>
-                      </m:e>
-                      <m:sup>
-                        <m:r>
-                          <a:rPr lang="en-CA" b="0" i="1" smtClean="0">
-                            <a:latin typeface="Cambria Math" panose="02040503050406030204" pitchFamily="18" charset="0"/>
-                          </a:rPr>
-                          <m:t>h</m:t>
-                        </m:r>
-                      </m:sup>
-                    </m:sSup>
-                  </m:oMath>
-                </a14:m>
-                <a:r>
-                  <a:rPr lang="en-US" dirty="0"/>
-                  <a:t> and </a:t>
-                </a:r>
-                <a14:m>
-                  <m:oMath xmlns:m="http://schemas.openxmlformats.org/officeDocument/2006/math">
-                    <m:sSup>
-                      <m:sSupPr>
-                        <m:ctrlPr>
-                          <a:rPr lang="en-US" i="1" smtClean="0">
-                            <a:latin typeface="Cambria Math" panose="02040503050406030204" pitchFamily="18" charset="0"/>
-                          </a:rPr>
-                        </m:ctrlPr>
-                      </m:sSupPr>
-                      <m:e>
-                        <m:r>
-                          <a:rPr lang="en-CA" b="0" i="1" smtClean="0">
-                            <a:latin typeface="Cambria Math" panose="02040503050406030204" pitchFamily="18" charset="0"/>
-                          </a:rPr>
-                          <m:t>2</m:t>
-                        </m:r>
-                      </m:e>
-                      <m:sup>
-                        <m:r>
-                          <a:rPr lang="en-CA" b="0" i="1" smtClean="0">
-                            <a:latin typeface="Cambria Math" panose="02040503050406030204" pitchFamily="18" charset="0"/>
-                          </a:rPr>
-                          <m:t>h</m:t>
-                        </m:r>
-                        <m:r>
-                          <a:rPr lang="en-CA" b="0" i="1" smtClean="0">
-                            <a:latin typeface="Cambria Math" panose="02040503050406030204" pitchFamily="18" charset="0"/>
-                          </a:rPr>
-                          <m:t>+1</m:t>
-                        </m:r>
-                      </m:sup>
-                    </m:sSup>
-                    <m:r>
-                      <a:rPr lang="en-CA" b="0" i="1" smtClean="0">
-                        <a:latin typeface="Cambria Math" panose="02040503050406030204" pitchFamily="18" charset="0"/>
-                      </a:rPr>
-                      <m:t>−1</m:t>
-                    </m:r>
-                  </m:oMath>
-                </a14:m>
-                <a:r>
-                  <a:rPr lang="en-US" dirty="0"/>
-                  <a:t> nodes</a:t>
-                </a:r>
-              </a:p>
-              <a:p>
-                <a:r>
-                  <a:rPr lang="en-US" dirty="0"/>
-                  <a:t>Therefore: </a:t>
-                </a:r>
-              </a:p>
-              <a:p>
-                <a:pPr lvl="1"/>
-                <a14:m>
-                  <m:oMath xmlns:m="http://schemas.openxmlformats.org/officeDocument/2006/math">
-                    <m:sSup>
-                      <m:sSupPr>
-                        <m:ctrlPr>
-                          <a:rPr lang="en-CA" b="0" i="1" smtClean="0">
-                            <a:latin typeface="Cambria Math" panose="02040503050406030204" pitchFamily="18" charset="0"/>
-                          </a:rPr>
-                        </m:ctrlPr>
-                      </m:sSupPr>
-                      <m:e>
-                        <m:r>
-                          <a:rPr lang="en-CA" b="0" i="1" smtClean="0">
-                            <a:latin typeface="Cambria Math" panose="02040503050406030204" pitchFamily="18" charset="0"/>
-                          </a:rPr>
-                          <m:t>2</m:t>
-                        </m:r>
-                      </m:e>
-                      <m:sup>
-                        <m:r>
-                          <a:rPr lang="en-CA" b="0" i="1" smtClean="0">
-                            <a:latin typeface="Cambria Math" panose="02040503050406030204" pitchFamily="18" charset="0"/>
-                          </a:rPr>
-                          <m:t>h</m:t>
-                        </m:r>
-                      </m:sup>
-                    </m:sSup>
-                    <m:r>
-                      <a:rPr lang="en-CA" b="0" i="1" smtClean="0">
-                        <a:latin typeface="Cambria Math" panose="02040503050406030204" pitchFamily="18" charset="0"/>
-                      </a:rPr>
-                      <m:t>≤</m:t>
-                    </m:r>
-                    <m:r>
-                      <a:rPr lang="en-CA" b="0" i="1" smtClean="0">
-                        <a:latin typeface="Cambria Math" panose="02040503050406030204" pitchFamily="18" charset="0"/>
-                      </a:rPr>
-                      <m:t>𝑛</m:t>
-                    </m:r>
-                    <m:r>
-                      <a:rPr lang="en-CA" b="0" i="1" smtClean="0">
-                        <a:latin typeface="Cambria Math" panose="02040503050406030204" pitchFamily="18" charset="0"/>
-                      </a:rPr>
-                      <m:t>≤</m:t>
-                    </m:r>
-                    <m:sSup>
-                      <m:sSupPr>
-                        <m:ctrlPr>
-                          <a:rPr lang="en-US" b="0" i="1" smtClean="0">
-                            <a:latin typeface="Cambria Math" panose="02040503050406030204" pitchFamily="18" charset="0"/>
-                          </a:rPr>
-                        </m:ctrlPr>
-                      </m:sSupPr>
-                      <m:e>
-                        <m:r>
-                          <a:rPr lang="en-CA" b="0" i="1" smtClean="0">
-                            <a:latin typeface="Cambria Math" panose="02040503050406030204" pitchFamily="18" charset="0"/>
-                          </a:rPr>
-                          <m:t>2</m:t>
-                        </m:r>
-                      </m:e>
-                      <m:sup>
-                        <m:r>
-                          <a:rPr lang="en-CA" b="0" i="1" smtClean="0">
-                            <a:latin typeface="Cambria Math" panose="02040503050406030204" pitchFamily="18" charset="0"/>
-                          </a:rPr>
-                          <m:t>h</m:t>
-                        </m:r>
-                        <m:r>
-                          <a:rPr lang="en-CA" b="0" i="1" smtClean="0">
-                            <a:latin typeface="Cambria Math" panose="02040503050406030204" pitchFamily="18" charset="0"/>
-                          </a:rPr>
-                          <m:t>+1</m:t>
-                        </m:r>
-                      </m:sup>
-                    </m:sSup>
-                    <m:r>
-                      <a:rPr lang="en-CA" b="0" i="1" smtClean="0">
-                        <a:latin typeface="Cambria Math" panose="02040503050406030204" pitchFamily="18" charset="0"/>
-                      </a:rPr>
-                      <m:t>−1</m:t>
-                    </m:r>
-                  </m:oMath>
-                </a14:m>
-                <a:endParaRPr lang="en-US" dirty="0"/>
-              </a:p>
-              <a:p>
-                <a:pPr lvl="1"/>
-                <a14:m>
-                  <m:oMath xmlns:m="http://schemas.openxmlformats.org/officeDocument/2006/math">
-                    <m:sSup>
-                      <m:sSupPr>
-                        <m:ctrlPr>
-                          <a:rPr lang="en-CA" b="0" i="1" smtClean="0">
-                            <a:latin typeface="Cambria Math" panose="02040503050406030204" pitchFamily="18" charset="0"/>
-                          </a:rPr>
-                        </m:ctrlPr>
-                      </m:sSupPr>
-                      <m:e>
-                        <m:r>
-                          <a:rPr lang="en-CA" b="0" i="1" smtClean="0">
-                            <a:latin typeface="Cambria Math" panose="02040503050406030204" pitchFamily="18" charset="0"/>
-                          </a:rPr>
-                          <m:t>2</m:t>
-                        </m:r>
-                      </m:e>
-                      <m:sup>
-                        <m:r>
-                          <a:rPr lang="en-CA" b="0" i="1" smtClean="0">
-                            <a:latin typeface="Cambria Math" panose="02040503050406030204" pitchFamily="18" charset="0"/>
-                          </a:rPr>
-                          <m:t>h</m:t>
-                        </m:r>
-                      </m:sup>
-                    </m:sSup>
-                    <m:r>
-                      <a:rPr lang="en-CA" b="0" i="1" smtClean="0">
-                        <a:latin typeface="Cambria Math" panose="02040503050406030204" pitchFamily="18" charset="0"/>
-                      </a:rPr>
-                      <m:t>≤</m:t>
-                    </m:r>
-                    <m:r>
-                      <a:rPr lang="en-CA" b="0" i="1" smtClean="0">
-                        <a:latin typeface="Cambria Math" panose="02040503050406030204" pitchFamily="18" charset="0"/>
-                      </a:rPr>
-                      <m:t>𝑛</m:t>
-                    </m:r>
-                    <m:r>
-                      <a:rPr lang="en-CA" b="0" i="1" smtClean="0">
-                        <a:latin typeface="Cambria Math" panose="02040503050406030204" pitchFamily="18" charset="0"/>
-                      </a:rPr>
-                      <m:t>≤</m:t>
-                    </m:r>
-                    <m:sSup>
-                      <m:sSupPr>
-                        <m:ctrlPr>
-                          <a:rPr lang="en-US" b="0" i="1" smtClean="0">
-                            <a:latin typeface="Cambria Math" panose="02040503050406030204" pitchFamily="18" charset="0"/>
-                          </a:rPr>
-                        </m:ctrlPr>
-                      </m:sSupPr>
-                      <m:e>
-                        <m:r>
-                          <a:rPr lang="en-CA" b="0" i="1" smtClean="0">
-                            <a:latin typeface="Cambria Math" panose="02040503050406030204" pitchFamily="18" charset="0"/>
-                          </a:rPr>
-                          <m:t>2</m:t>
-                        </m:r>
-                      </m:e>
-                      <m:sup>
-                        <m:r>
-                          <a:rPr lang="en-CA" b="0" i="1" smtClean="0">
-                            <a:latin typeface="Cambria Math" panose="02040503050406030204" pitchFamily="18" charset="0"/>
-                          </a:rPr>
-                          <m:t>h</m:t>
-                        </m:r>
-                        <m:r>
-                          <a:rPr lang="en-CA" b="0" i="1" smtClean="0">
-                            <a:latin typeface="Cambria Math" panose="02040503050406030204" pitchFamily="18" charset="0"/>
-                          </a:rPr>
-                          <m:t>+1</m:t>
-                        </m:r>
-                      </m:sup>
-                    </m:sSup>
-                    <m:r>
-                      <a:rPr lang="en-CA" b="0" i="1" smtClean="0">
-                        <a:latin typeface="Cambria Math" panose="02040503050406030204" pitchFamily="18" charset="0"/>
-                      </a:rPr>
-                      <m:t>−1</m:t>
-                    </m:r>
-                    <m:r>
-                      <a:rPr lang="en-CA" b="0" i="0" smtClean="0">
-                        <a:latin typeface="Cambria Math" panose="02040503050406030204" pitchFamily="18" charset="0"/>
-                      </a:rPr>
-                      <m:t>&lt;</m:t>
-                    </m:r>
-                    <m:sSup>
-                      <m:sSupPr>
-                        <m:ctrlPr>
-                          <a:rPr lang="en-US" b="0" i="1" smtClean="0">
-                            <a:latin typeface="Cambria Math" panose="02040503050406030204" pitchFamily="18" charset="0"/>
-                          </a:rPr>
-                        </m:ctrlPr>
-                      </m:sSupPr>
-                      <m:e>
-                        <m:r>
-                          <a:rPr lang="en-CA" b="0" i="1" smtClean="0">
-                            <a:latin typeface="Cambria Math" panose="02040503050406030204" pitchFamily="18" charset="0"/>
-                          </a:rPr>
-                          <m:t>2</m:t>
-                        </m:r>
-                      </m:e>
-                      <m:sup>
-                        <m:r>
-                          <a:rPr lang="en-CA" b="0" i="1" smtClean="0">
-                            <a:latin typeface="Cambria Math" panose="02040503050406030204" pitchFamily="18" charset="0"/>
-                          </a:rPr>
-                          <m:t>h</m:t>
-                        </m:r>
-                        <m:r>
-                          <a:rPr lang="en-CA" b="0" i="1" smtClean="0">
-                            <a:latin typeface="Cambria Math" panose="02040503050406030204" pitchFamily="18" charset="0"/>
-                          </a:rPr>
-                          <m:t>+1</m:t>
-                        </m:r>
-                      </m:sup>
-                    </m:sSup>
-                  </m:oMath>
-                </a14:m>
-                <a:endParaRPr lang="en-CA" b="0" dirty="0"/>
-              </a:p>
-              <a:p>
-                <a:pPr lvl="1"/>
-                <a14:m>
-                  <m:oMath xmlns:m="http://schemas.openxmlformats.org/officeDocument/2006/math">
-                    <m:sSup>
-                      <m:sSupPr>
-                        <m:ctrlPr>
-                          <a:rPr lang="en-CA" b="0" i="1" smtClean="0">
-                            <a:latin typeface="Cambria Math" panose="02040503050406030204" pitchFamily="18" charset="0"/>
-                          </a:rPr>
-                        </m:ctrlPr>
-                      </m:sSupPr>
-                      <m:e>
-                        <m:r>
-                          <a:rPr lang="en-CA" b="0" i="1" smtClean="0">
-                            <a:latin typeface="Cambria Math" panose="02040503050406030204" pitchFamily="18" charset="0"/>
-                          </a:rPr>
-                          <m:t>2</m:t>
-                        </m:r>
-                      </m:e>
-                      <m:sup>
-                        <m:r>
-                          <a:rPr lang="en-CA" b="0" i="1" smtClean="0">
-                            <a:latin typeface="Cambria Math" panose="02040503050406030204" pitchFamily="18" charset="0"/>
-                          </a:rPr>
-                          <m:t>h</m:t>
-                        </m:r>
-                      </m:sup>
-                    </m:sSup>
-                    <m:r>
-                      <a:rPr lang="en-CA" b="0" i="1" smtClean="0">
-                        <a:latin typeface="Cambria Math" panose="02040503050406030204" pitchFamily="18" charset="0"/>
-                      </a:rPr>
-                      <m:t>≤</m:t>
-                    </m:r>
-                    <m:r>
-                      <a:rPr lang="en-CA" b="0" i="1" smtClean="0">
-                        <a:latin typeface="Cambria Math" panose="02040503050406030204" pitchFamily="18" charset="0"/>
-                      </a:rPr>
-                      <m:t>𝑛</m:t>
-                    </m:r>
-                    <m:r>
-                      <a:rPr lang="en-CA" b="0" i="1" smtClean="0">
-                        <a:latin typeface="Cambria Math" panose="02040503050406030204" pitchFamily="18" charset="0"/>
-                      </a:rPr>
-                      <m:t>&lt;</m:t>
-                    </m:r>
-                    <m:sSup>
-                      <m:sSupPr>
-                        <m:ctrlPr>
-                          <a:rPr lang="en-US" b="0" i="1" smtClean="0">
-                            <a:latin typeface="Cambria Math" panose="02040503050406030204" pitchFamily="18" charset="0"/>
-                          </a:rPr>
-                        </m:ctrlPr>
-                      </m:sSupPr>
-                      <m:e>
-                        <m:r>
-                          <a:rPr lang="en-CA" b="0" i="1" smtClean="0">
-                            <a:latin typeface="Cambria Math" panose="02040503050406030204" pitchFamily="18" charset="0"/>
-                          </a:rPr>
-                          <m:t>2</m:t>
-                        </m:r>
-                      </m:e>
-                      <m:sup>
-                        <m:r>
-                          <a:rPr lang="en-CA" b="0" i="1" smtClean="0">
-                            <a:latin typeface="Cambria Math" panose="02040503050406030204" pitchFamily="18" charset="0"/>
-                          </a:rPr>
-                          <m:t>h</m:t>
-                        </m:r>
-                        <m:r>
-                          <a:rPr lang="en-CA" b="0" i="1" smtClean="0">
-                            <a:latin typeface="Cambria Math" panose="02040503050406030204" pitchFamily="18" charset="0"/>
-                          </a:rPr>
-                          <m:t>+1</m:t>
-                        </m:r>
-                      </m:sup>
-                    </m:sSup>
-                  </m:oMath>
-                </a14:m>
-                <a:endParaRPr lang="en-CA" b="0" dirty="0"/>
-              </a:p>
-              <a:p>
-                <a:r>
-                  <a:rPr lang="en-US" dirty="0"/>
-                  <a:t>Take log base 2 of all terms of the inequality to get:</a:t>
-                </a:r>
-              </a:p>
-              <a:p>
-                <a:pPr lvl="1"/>
-                <a14:m>
-                  <m:oMath xmlns:m="http://schemas.openxmlformats.org/officeDocument/2006/math">
-                    <m:r>
-                      <a:rPr lang="en-CA" b="0" i="1" smtClean="0">
-                        <a:latin typeface="Cambria Math" panose="02040503050406030204" pitchFamily="18" charset="0"/>
-                      </a:rPr>
-                      <m:t>h</m:t>
-                    </m:r>
-                    <m:r>
-                      <a:rPr lang="en-CA" b="0" i="1" smtClean="0">
-                        <a:latin typeface="Cambria Math" panose="02040503050406030204" pitchFamily="18" charset="0"/>
-                      </a:rPr>
-                      <m:t>≤</m:t>
-                    </m:r>
-                    <m:func>
-                      <m:funcPr>
-                        <m:ctrlPr>
-                          <a:rPr lang="en-US" b="0" i="1" smtClean="0">
-                            <a:latin typeface="Cambria Math" panose="02040503050406030204" pitchFamily="18" charset="0"/>
-                          </a:rPr>
-                        </m:ctrlPr>
-                      </m:funcPr>
-                      <m:fName>
-                        <m:r>
-                          <m:rPr>
-                            <m:sty m:val="p"/>
-                          </m:rPr>
-                          <a:rPr lang="en-US" b="0" i="0" smtClean="0">
-                            <a:latin typeface="Cambria Math" panose="02040503050406030204" pitchFamily="18" charset="0"/>
-                          </a:rPr>
-                          <m:t>log</m:t>
-                        </m:r>
-                      </m:fName>
-                      <m:e>
-                        <m:r>
-                          <a:rPr lang="en-CA" b="0" i="1" smtClean="0">
-                            <a:latin typeface="Cambria Math" panose="02040503050406030204" pitchFamily="18" charset="0"/>
-                          </a:rPr>
-                          <m:t>𝑛</m:t>
-                        </m:r>
-                        <m:r>
-                          <a:rPr lang="en-CA" b="0" i="1" smtClean="0">
-                            <a:latin typeface="Cambria Math" panose="02040503050406030204" pitchFamily="18" charset="0"/>
-                          </a:rPr>
-                          <m:t>&lt;</m:t>
-                        </m:r>
-                        <m:r>
-                          <a:rPr lang="en-CA" b="0" i="1" smtClean="0">
-                            <a:latin typeface="Cambria Math" panose="02040503050406030204" pitchFamily="18" charset="0"/>
-                          </a:rPr>
-                          <m:t>h</m:t>
-                        </m:r>
-                        <m:r>
-                          <a:rPr lang="en-CA" b="0" i="1" smtClean="0">
-                            <a:latin typeface="Cambria Math" panose="02040503050406030204" pitchFamily="18" charset="0"/>
-                          </a:rPr>
-                          <m:t>+1</m:t>
-                        </m:r>
-                      </m:e>
-                    </m:func>
-                  </m:oMath>
-                </a14:m>
-                <a:endParaRPr lang="en-US" dirty="0"/>
-              </a:p>
-              <a:p>
-                <a:pPr lvl="1"/>
-                <a:r>
-                  <a:rPr lang="en-US" dirty="0"/>
-                  <a:t>Therefore: </a:t>
-                </a:r>
-                <a14:m>
-                  <m:oMath xmlns:m="http://schemas.openxmlformats.org/officeDocument/2006/math">
-                    <m:r>
-                      <a:rPr lang="en-CA" b="0" i="1" smtClean="0">
-                        <a:latin typeface="Cambria Math" panose="02040503050406030204" pitchFamily="18" charset="0"/>
-                      </a:rPr>
-                      <m:t>h</m:t>
-                    </m:r>
-                    <m:r>
-                      <a:rPr lang="en-CA" b="0" i="1" smtClean="0">
-                        <a:latin typeface="Cambria Math" panose="02040503050406030204" pitchFamily="18" charset="0"/>
-                      </a:rPr>
-                      <m:t>=</m:t>
-                    </m:r>
-                    <m:d>
-                      <m:dPr>
-                        <m:begChr m:val="⌊"/>
-                        <m:endChr m:val="⌋"/>
-                        <m:ctrlPr>
-                          <a:rPr lang="en-US" b="0" i="1" smtClean="0">
-                            <a:latin typeface="Cambria Math" panose="02040503050406030204" pitchFamily="18" charset="0"/>
-                          </a:rPr>
-                        </m:ctrlPr>
-                      </m:dPr>
-                      <m:e>
-                        <m:func>
-                          <m:funcPr>
-                            <m:ctrlPr>
-                              <a:rPr lang="en-US" b="0" i="1" smtClean="0">
-                                <a:latin typeface="Cambria Math" panose="02040503050406030204" pitchFamily="18" charset="0"/>
-                              </a:rPr>
-                            </m:ctrlPr>
-                          </m:funcPr>
-                          <m:fName>
-                            <m:sSub>
-                              <m:sSubPr>
-                                <m:ctrlPr>
-                                  <a:rPr lang="en-US" b="0" i="1" smtClean="0">
-                                    <a:latin typeface="Cambria Math" panose="02040503050406030204" pitchFamily="18" charset="0"/>
-                                  </a:rPr>
-                                </m:ctrlPr>
-                              </m:sSubPr>
-                              <m:e>
-                                <m:r>
-                                  <m:rPr>
-                                    <m:sty m:val="p"/>
-                                  </m:rPr>
-                                  <a:rPr lang="en-US" b="0" i="0" smtClean="0">
-                                    <a:latin typeface="Cambria Math" panose="02040503050406030204" pitchFamily="18" charset="0"/>
-                                  </a:rPr>
-                                  <m:t>log</m:t>
-                                </m:r>
-                              </m:e>
-                              <m:sub>
-                                <m:r>
-                                  <a:rPr lang="en-CA" b="0" i="1" smtClean="0">
-                                    <a:latin typeface="Cambria Math" panose="02040503050406030204" pitchFamily="18" charset="0"/>
-                                  </a:rPr>
-                                  <m:t>2</m:t>
-                                </m:r>
-                              </m:sub>
-                            </m:sSub>
-                          </m:fName>
-                          <m:e>
-                            <m:r>
-                              <a:rPr lang="en-CA" b="0" i="1" smtClean="0">
-                                <a:latin typeface="Cambria Math" panose="02040503050406030204" pitchFamily="18" charset="0"/>
-                              </a:rPr>
-                              <m:t>𝑛</m:t>
-                            </m:r>
-                          </m:e>
-                        </m:func>
-                      </m:e>
-                    </m:d>
-                  </m:oMath>
-                </a14:m>
-                <a:endParaRPr lang="en-US" dirty="0"/>
-              </a:p>
-            </p:txBody>
-          </p:sp>
-        </mc:Choice>
-        <mc:Fallback>
-          <p:sp>
-            <p:nvSpPr>
-              <p:cNvPr id="3" name="Content Placeholder 2">
-                <a:extLst>
-                  <a:ext uri="{FF2B5EF4-FFF2-40B4-BE49-F238E27FC236}">
-                    <a16:creationId xmlns:a16="http://schemas.microsoft.com/office/drawing/2014/main" id="{B8C0F48B-B380-4251-F7BA-F921B6C0BB5E}"/>
-                  </a:ext>
-                </a:extLst>
-              </p:cNvPr>
-              <p:cNvSpPr>
-                <a:spLocks noGrp="1" noRot="1" noChangeAspect="1" noMove="1" noResize="1" noEditPoints="1" noAdjustHandles="1" noChangeArrowheads="1" noChangeShapeType="1" noTextEdit="1"/>
-              </p:cNvSpPr>
-              <p:nvPr>
-                <p:ph idx="1"/>
-              </p:nvPr>
-            </p:nvSpPr>
-            <p:spPr>
-              <a:blipFill>
-                <a:blip r:embed="rId3"/>
-                <a:stretch>
-                  <a:fillRect l="-965" t="-2616"/>
-                </a:stretch>
-              </a:blipFill>
-            </p:spPr>
-            <p:txBody>
-              <a:bodyPr/>
-              <a:lstStyle/>
-              <a:p>
-                <a:r>
-                  <a:rPr lang="en-US">
-                    <a:noFill/>
-                  </a:rPr>
-                  <a:t> </a:t>
-                </a:r>
-              </a:p>
-            </p:txBody>
-          </p:sp>
-        </mc:Fallback>
-      </mc:AlternateContent>
-      <mc:AlternateContent xmlns:mc="http://schemas.openxmlformats.org/markup-compatibility/2006">
-        <mc:Choice xmlns:a14="http://schemas.microsoft.com/office/drawing/2010/main" Requires="a14">
-          <p:sp>
-            <p:nvSpPr>
-              <p:cNvPr id="4" name="TextBox 3">
-                <a:extLst>
-                  <a:ext uri="{FF2B5EF4-FFF2-40B4-BE49-F238E27FC236}">
-                    <a16:creationId xmlns:a16="http://schemas.microsoft.com/office/drawing/2014/main" id="{6291824A-8A1B-1E60-E3EE-6E03EA2819D3}"/>
-                  </a:ext>
-                </a:extLst>
-              </p:cNvPr>
-              <p:cNvSpPr txBox="1"/>
-              <p:nvPr/>
-            </p:nvSpPr>
-            <p:spPr>
-              <a:xfrm>
-                <a:off x="5034225" y="3214138"/>
-                <a:ext cx="2331218" cy="923330"/>
-              </a:xfrm>
-              <a:prstGeom prst="rect">
-                <a:avLst/>
-              </a:prstGeom>
-              <a:solidFill>
-                <a:schemeClr val="accent2">
-                  <a:lumMod val="40000"/>
-                  <a:lumOff val="60000"/>
-                </a:schemeClr>
-              </a:solidFill>
-            </p:spPr>
-            <p:txBody>
-              <a:bodyPr wrap="square" rtlCol="0">
-                <a:spAutoFit/>
-              </a:bodyPr>
-              <a:lstStyle/>
-              <a:p>
-                <a:pPr algn="ctr"/>
-                <a14:m>
-                  <m:oMath xmlns:m="http://schemas.openxmlformats.org/officeDocument/2006/math">
-                    <m:r>
-                      <a:rPr lang="en-US" i="1" dirty="0" smtClean="0">
-                        <a:latin typeface="Cambria Math" panose="02040503050406030204" pitchFamily="18" charset="0"/>
-                      </a:rPr>
-                      <m:t>𝑛</m:t>
-                    </m:r>
-                  </m:oMath>
-                </a14:m>
-                <a:r>
-                  <a:rPr lang="en-US" dirty="0"/>
-                  <a:t> is the number of nodes in a complete binary tree of height </a:t>
-                </a:r>
-                <a14:m>
-                  <m:oMath xmlns:m="http://schemas.openxmlformats.org/officeDocument/2006/math">
-                    <m:r>
-                      <a:rPr lang="en-US" i="1" dirty="0" smtClean="0">
-                        <a:latin typeface="Cambria Math" panose="02040503050406030204" pitchFamily="18" charset="0"/>
-                      </a:rPr>
-                      <m:t>h</m:t>
-                    </m:r>
-                  </m:oMath>
-                </a14:m>
-                <a:endParaRPr lang="en-US" dirty="0"/>
-              </a:p>
-            </p:txBody>
-          </p:sp>
-        </mc:Choice>
-        <mc:Fallback>
-          <p:sp>
-            <p:nvSpPr>
-              <p:cNvPr id="4" name="TextBox 3">
-                <a:extLst>
-                  <a:ext uri="{FF2B5EF4-FFF2-40B4-BE49-F238E27FC236}">
-                    <a16:creationId xmlns:a16="http://schemas.microsoft.com/office/drawing/2014/main" id="{6291824A-8A1B-1E60-E3EE-6E03EA2819D3}"/>
-                  </a:ext>
-                </a:extLst>
-              </p:cNvPr>
-              <p:cNvSpPr txBox="1">
-                <a:spLocks noRot="1" noChangeAspect="1" noMove="1" noResize="1" noEditPoints="1" noAdjustHandles="1" noChangeArrowheads="1" noChangeShapeType="1" noTextEdit="1"/>
-              </p:cNvSpPr>
-              <p:nvPr/>
-            </p:nvSpPr>
-            <p:spPr>
-              <a:xfrm>
-                <a:off x="5034225" y="3214138"/>
-                <a:ext cx="2331218" cy="923330"/>
-              </a:xfrm>
-              <a:prstGeom prst="rect">
-                <a:avLst/>
-              </a:prstGeom>
-              <a:blipFill>
-                <a:blip r:embed="rId4"/>
-                <a:stretch>
-                  <a:fillRect l="-1630" t="-1351" r="-1087" b="-10811"/>
-                </a:stretch>
-              </a:blipFill>
-            </p:spPr>
-            <p:txBody>
-              <a:bodyPr/>
-              <a:lstStyle/>
-              <a:p>
-                <a:r>
-                  <a:rPr lang="en-US">
-                    <a:noFill/>
-                  </a:rPr>
-                  <a:t> </a:t>
-                </a:r>
-              </a:p>
-            </p:txBody>
-          </p:sp>
-        </mc:Fallback>
-      </mc:AlternateContent>
-      <p:sp>
-        <p:nvSpPr>
-          <p:cNvPr id="5" name="Freeform 4">
-            <a:extLst>
-              <a:ext uri="{FF2B5EF4-FFF2-40B4-BE49-F238E27FC236}">
-                <a16:creationId xmlns:a16="http://schemas.microsoft.com/office/drawing/2014/main" id="{17E68C73-5AB0-5278-E90B-0B41FBD4AECD}"/>
-              </a:ext>
-            </a:extLst>
-          </p:cNvPr>
-          <p:cNvSpPr/>
-          <p:nvPr/>
-        </p:nvSpPr>
-        <p:spPr>
-          <a:xfrm>
-            <a:off x="2461847" y="3214138"/>
-            <a:ext cx="2572378" cy="615849"/>
-          </a:xfrm>
-          <a:custGeom>
-            <a:avLst/>
-            <a:gdLst>
-              <a:gd name="csX0" fmla="*/ 2572378 w 2572378"/>
-              <a:gd name="csY0" fmla="*/ 123480 h 615849"/>
-              <a:gd name="csX1" fmla="*/ 1115367 w 2572378"/>
-              <a:gd name="csY1" fmla="*/ 33045 h 615849"/>
-              <a:gd name="csX2" fmla="*/ 0 w 2572378"/>
-              <a:gd name="csY2" fmla="*/ 615849 h 615849"/>
-            </a:gdLst>
-            <a:ahLst/>
-            <a:cxnLst>
-              <a:cxn ang="0">
-                <a:pos x="csX0" y="csY0"/>
-              </a:cxn>
-              <a:cxn ang="0">
-                <a:pos x="csX1" y="csY1"/>
-              </a:cxn>
-              <a:cxn ang="0">
-                <a:pos x="csX2" y="csY2"/>
-              </a:cxn>
-            </a:cxnLst>
-            <a:rect l="l" t="t" r="r" b="b"/>
-            <a:pathLst>
-              <a:path w="2572378" h="615849">
-                <a:moveTo>
-                  <a:pt x="2572378" y="123480"/>
-                </a:moveTo>
-                <a:cubicBezTo>
-                  <a:pt x="2058237" y="37232"/>
-                  <a:pt x="1544097" y="-49016"/>
-                  <a:pt x="1115367" y="33045"/>
-                </a:cubicBezTo>
-                <a:cubicBezTo>
-                  <a:pt x="686637" y="115106"/>
-                  <a:pt x="343318" y="365477"/>
-                  <a:pt x="0" y="615849"/>
-                </a:cubicBezTo>
-              </a:path>
-            </a:pathLst>
-          </a:custGeom>
-          <a:ln>
-            <a:headEnd type="none" w="med" len="med"/>
-            <a:tailEnd type="triangle" w="med" len="med"/>
-          </a:ln>
-        </p:spPr>
-        <p:style>
-          <a:lnRef idx="1">
-            <a:schemeClr val="accent4"/>
-          </a:lnRef>
-          <a:fillRef idx="0">
-            <a:schemeClr val="accent4"/>
-          </a:fillRef>
-          <a:effectRef idx="0">
-            <a:schemeClr val="accent4"/>
-          </a:effectRef>
-          <a:fontRef idx="minor">
-            <a:schemeClr val="tx1"/>
-          </a:fontRef>
-        </p:style>
-        <p:txBody>
-          <a:bodyPr rtlCol="0" anchor="ctr"/>
-          <a:lstStyle/>
-          <a:p>
-            <a:pPr algn="ctr"/>
-            <a:endParaRPr lang="en-US" dirty="0"/>
-          </a:p>
-        </p:txBody>
-      </p:sp>
-      <mc:AlternateContent xmlns:mc="http://schemas.openxmlformats.org/markup-compatibility/2006">
-        <mc:Choice xmlns:a14="http://schemas.microsoft.com/office/drawing/2010/main" Requires="a14">
-          <p:sp>
-            <p:nvSpPr>
-              <p:cNvPr id="6" name="TextBox 5">
-                <a:extLst>
-                  <a:ext uri="{FF2B5EF4-FFF2-40B4-BE49-F238E27FC236}">
-                    <a16:creationId xmlns:a16="http://schemas.microsoft.com/office/drawing/2014/main" id="{3AF191AF-5649-3F68-B501-31D02B1B4660}"/>
-                  </a:ext>
-                </a:extLst>
-              </p:cNvPr>
-              <p:cNvSpPr txBox="1"/>
-              <p:nvPr/>
-            </p:nvSpPr>
-            <p:spPr>
-              <a:xfrm>
-                <a:off x="5034224" y="5525981"/>
-                <a:ext cx="2572377" cy="923330"/>
-              </a:xfrm>
-              <a:prstGeom prst="rect">
-                <a:avLst/>
-              </a:prstGeom>
-              <a:solidFill>
-                <a:schemeClr val="accent2">
-                  <a:lumMod val="40000"/>
-                  <a:lumOff val="60000"/>
-                </a:schemeClr>
-              </a:solidFill>
-            </p:spPr>
-            <p:txBody>
-              <a:bodyPr wrap="square" rtlCol="0">
-                <a:spAutoFit/>
-              </a:bodyPr>
-              <a:lstStyle/>
-              <a:p>
-                <a:pPr algn="ctr"/>
-                <a:r>
-                  <a:rPr lang="en-US" dirty="0"/>
-                  <a:t>Recall that </a:t>
-                </a:r>
-                <a14:m>
-                  <m:oMath xmlns:m="http://schemas.openxmlformats.org/officeDocument/2006/math">
-                    <m:d>
-                      <m:dPr>
-                        <m:begChr m:val="⌊"/>
-                        <m:endChr m:val="⌋"/>
-                        <m:ctrlPr>
-                          <a:rPr lang="en-US" i="1" smtClean="0">
-                            <a:latin typeface="Cambria Math" panose="02040503050406030204" pitchFamily="18" charset="0"/>
-                          </a:rPr>
-                        </m:ctrlPr>
-                      </m:dPr>
-                      <m:e>
-                        <m:r>
-                          <a:rPr lang="en-CA" b="0" i="1" smtClean="0">
-                            <a:latin typeface="Cambria Math" panose="02040503050406030204" pitchFamily="18" charset="0"/>
-                          </a:rPr>
-                          <m:t>𝑥</m:t>
-                        </m:r>
-                      </m:e>
-                    </m:d>
-                  </m:oMath>
-                </a14:m>
-                <a:r>
-                  <a:rPr lang="en-US" dirty="0"/>
-                  <a:t> means </a:t>
-                </a:r>
-                <a:r>
-                  <a:rPr lang="en-US" b="1" dirty="0"/>
-                  <a:t>floor</a:t>
-                </a:r>
-                <a:r>
-                  <a:rPr lang="en-US" dirty="0"/>
-                  <a:t>, i.e. chop of any digits after the decimal.</a:t>
-                </a:r>
-              </a:p>
-            </p:txBody>
-          </p:sp>
-        </mc:Choice>
-        <mc:Fallback>
-          <p:sp>
-            <p:nvSpPr>
-              <p:cNvPr id="6" name="TextBox 5">
-                <a:extLst>
-                  <a:ext uri="{FF2B5EF4-FFF2-40B4-BE49-F238E27FC236}">
-                    <a16:creationId xmlns:a16="http://schemas.microsoft.com/office/drawing/2014/main" id="{3AF191AF-5649-3F68-B501-31D02B1B4660}"/>
-                  </a:ext>
-                </a:extLst>
-              </p:cNvPr>
-              <p:cNvSpPr txBox="1">
-                <a:spLocks noRot="1" noChangeAspect="1" noMove="1" noResize="1" noEditPoints="1" noAdjustHandles="1" noChangeArrowheads="1" noChangeShapeType="1" noTextEdit="1"/>
-              </p:cNvSpPr>
-              <p:nvPr/>
-            </p:nvSpPr>
-            <p:spPr>
-              <a:xfrm>
-                <a:off x="5034224" y="5525981"/>
-                <a:ext cx="2572377" cy="923330"/>
-              </a:xfrm>
-              <a:prstGeom prst="rect">
-                <a:avLst/>
-              </a:prstGeom>
-              <a:blipFill>
-                <a:blip r:embed="rId5"/>
-                <a:stretch>
-                  <a:fillRect l="-490" t="-2703" b="-10811"/>
-                </a:stretch>
-              </a:blipFill>
-            </p:spPr>
-            <p:txBody>
-              <a:bodyPr/>
-              <a:lstStyle/>
-              <a:p>
-                <a:r>
-                  <a:rPr lang="en-US">
-                    <a:noFill/>
-                  </a:rPr>
-                  <a:t> </a:t>
-                </a:r>
-              </a:p>
-            </p:txBody>
-          </p:sp>
-        </mc:Fallback>
-      </mc:AlternateContent>
-    </p:spTree>
-    <p:extLst>
-      <p:ext uri="{BB962C8B-B14F-4D97-AF65-F5344CB8AC3E}">
-        <p14:creationId xmlns:p14="http://schemas.microsoft.com/office/powerpoint/2010/main" val="111845022"/>
       </p:ext>
     </p:extLst>
   </p:cSld>
